--- a/docs/sf-auto-agent-design.pptx
+++ b/docs/sf-auto-agent-design.pptx
@@ -3099,8 +3099,8 @@
         </p:nvSpPr>
         <p:spPr>
           <a:xfrm>
-            <a:off x="548640" y="365760"/>
-            <a:ext cx="13533120" cy="822960"/>
+            <a:off x="548640" y="3108960"/>
+            <a:ext cx="13533120" cy="914400"/>
           </a:xfrm>
           <a:prstGeom prst="rect">
             <a:avLst/>
@@ -3108,19 +3108,19 @@
           <a:noFill/>
         </p:spPr>
         <p:txBody>
-          <a:bodyPr wrap="none">
+          <a:bodyPr wrap="square" lIns="18288" rIns="18288" tIns="0" bIns="0">
             <a:spAutoFit/>
           </a:bodyPr>
           <a:lstStyle/>
           <a:p>
-            <a:pPr algn="l"/>
-            <a:r>
-              <a:rPr sz="3200" b="1">
+            <a:pPr algn="ctr"/>
+            <a:r>
+              <a:rPr sz="4400" b="1">
                 <a:solidFill>
                   <a:srgbClr val="1F4E78"/>
                 </a:solidFill>
               </a:rPr>
-              <a:t>SF Auto Agent — End-to-End Process</a:t>
+              <a:t>SF Auto Agent</a:t>
             </a:r>
           </a:p>
         </p:txBody>
@@ -3133,8 +3133,8 @@
         </p:nvSpPr>
         <p:spPr>
           <a:xfrm>
-            <a:off x="548640" y="1097280"/>
-            <a:ext cx="13533120" cy="457200"/>
+            <a:off x="548640" y="4023360"/>
+            <a:ext cx="13533120" cy="548640"/>
           </a:xfrm>
           <a:prstGeom prst="rect">
             <a:avLst/>
@@ -3142,18 +3142,53 @@
           <a:noFill/>
         </p:spPr>
         <p:txBody>
-          <a:bodyPr wrap="none">
+          <a:bodyPr wrap="square" lIns="18288" rIns="18288" tIns="0" bIns="0">
             <a:spAutoFit/>
           </a:bodyPr>
           <a:lstStyle/>
           <a:p>
-            <a:r>
-              <a:rPr sz="1600">
+            <a:pPr algn="ctr"/>
+            <a:r>
+              <a:rPr sz="2400" b="0">
                 <a:solidFill>
                   <a:srgbClr val="606060"/>
                 </a:solidFill>
               </a:rPr>
-              <a:t>Jira → Orchestrator → Planning → Build → Quality → PR</a:t>
+              <a:t>End-to-End Solution Design</a:t>
+            </a:r>
+          </a:p>
+        </p:txBody>
+      </p:sp>
+      <p:sp>
+        <p:nvSpPr>
+          <p:cNvPr id="4" name="TextBox 3"/>
+          <p:cNvSpPr txBox="1"/>
+          <p:nvPr/>
+        </p:nvSpPr>
+        <p:spPr>
+          <a:xfrm>
+            <a:off x="548640" y="4754880"/>
+            <a:ext cx="13533120" cy="457200"/>
+          </a:xfrm>
+          <a:prstGeom prst="rect">
+            <a:avLst/>
+          </a:prstGeom>
+          <a:noFill/>
+        </p:spPr>
+        <p:txBody>
+          <a:bodyPr wrap="square" lIns="18288" rIns="18288" tIns="0" bIns="0">
+            <a:spAutoFit/>
+          </a:bodyPr>
+          <a:lstStyle/>
+          <a:p>
+            <a:pPr algn="ctr"/>
+            <a:r>
+              <a:rPr sz="1600" b="0">
+                <a:solidFill>
+                  <a:srgbClr val="202020"/>
+                </a:solidFill>
+              </a:rPr>
+              <a:t>Jira → AI Orchestrator → Salesforce PR — fully governed, human-approved.</a:t>
             </a:r>
           </a:p>
         </p:txBody>
@@ -3184,8 +3219,8 @@
         </p:nvSpPr>
         <p:spPr>
           <a:xfrm>
-            <a:off x="457200" y="228600"/>
-            <a:ext cx="13716000" cy="457200"/>
+            <a:off x="457200" y="274320"/>
+            <a:ext cx="13716000" cy="502920"/>
           </a:xfrm>
           <a:prstGeom prst="rect">
             <a:avLst/>
@@ -3193,14 +3228,14 @@
           <a:noFill/>
         </p:spPr>
         <p:txBody>
-          <a:bodyPr wrap="none" lIns="18288" rIns="18288" tIns="0" bIns="0">
+          <a:bodyPr wrap="square" lIns="18288" rIns="18288" tIns="0" bIns="0">
             <a:spAutoFit/>
           </a:bodyPr>
           <a:lstStyle/>
           <a:p>
-            <a:pPr algn="ctr"/>
-            <a:r>
-              <a:rPr sz="2400" b="1">
+            <a:pPr algn="l"/>
+            <a:r>
+              <a:rPr sz="2600" b="1">
                 <a:solidFill>
                   <a:srgbClr val="1F4E78"/>
                 </a:solidFill>
@@ -3212,22 +3247,102 @@
       </p:sp>
       <p:sp>
         <p:nvSpPr>
-          <p:cNvPr id="3" name="Rounded Rectangle 2"/>
+          <p:cNvPr id="3" name="TextBox 2"/>
+          <p:cNvSpPr txBox="1"/>
+          <p:nvPr/>
+        </p:nvSpPr>
+        <p:spPr>
+          <a:xfrm>
+            <a:off x="457200" y="777240"/>
+            <a:ext cx="13716000" cy="320040"/>
+          </a:xfrm>
+          <a:prstGeom prst="rect">
+            <a:avLst/>
+          </a:prstGeom>
+          <a:noFill/>
+        </p:spPr>
+        <p:txBody>
+          <a:bodyPr wrap="square" lIns="18288" rIns="18288" tIns="0" bIns="0">
+            <a:spAutoFit/>
+          </a:bodyPr>
+          <a:lstStyle/>
+          <a:p>
+            <a:pPr algn="l"/>
+            <a:r>
+              <a:rPr sz="1200" b="0">
+                <a:solidFill>
+                  <a:srgbClr val="606060"/>
+                </a:solidFill>
+              </a:rPr>
+              <a:t>Six sequential phases. Hard gates: human reply (Phase 2) · human approval (Phase 3) · human merge (after Phase 6).</a:t>
+            </a:r>
+          </a:p>
+        </p:txBody>
+      </p:sp>
+      <p:sp>
+        <p:nvSpPr>
+          <p:cNvPr id="4" name="Rectangle 3"/>
           <p:cNvSpPr/>
           <p:nvPr/>
         </p:nvSpPr>
         <p:spPr>
           <a:xfrm>
-            <a:off x="6126480" y="914400"/>
-            <a:ext cx="2377440" cy="777240"/>
-          </a:xfrm>
-          <a:prstGeom prst="roundRect">
+            <a:off x="182880" y="1234440"/>
+            <a:ext cx="14264640" cy="1051560"/>
+          </a:xfrm>
+          <a:prstGeom prst="rect">
+            <a:avLst/>
+          </a:prstGeom>
+          <a:solidFill>
+            <a:srgbClr val="F7F7F7"/>
+          </a:solidFill>
+          <a:ln w="6350">
+            <a:solidFill>
+              <a:srgbClr val="CCCCCC"/>
+            </a:solidFill>
+          </a:ln>
+          <a:effectLst/>
+        </p:spPr>
+        <p:style>
+          <a:lnRef idx="1">
+            <a:schemeClr val="accent1"/>
+          </a:lnRef>
+          <a:fillRef idx="3">
+            <a:schemeClr val="accent1"/>
+          </a:fillRef>
+          <a:effectRef idx="2">
+            <a:schemeClr val="accent1"/>
+          </a:effectRef>
+          <a:fontRef idx="minor">
+            <a:schemeClr val="lt1"/>
+          </a:fontRef>
+        </p:style>
+        <p:txBody>
+          <a:bodyPr rtlCol="0" anchor="ctr"/>
+          <a:lstStyle/>
+          <a:p>
+            <a:pPr algn="ctr"/>
+          </a:p>
+        </p:txBody>
+      </p:sp>
+      <p:sp>
+        <p:nvSpPr>
+          <p:cNvPr id="5" name="Rectangle 4"/>
+          <p:cNvSpPr/>
+          <p:nvPr/>
+        </p:nvSpPr>
+        <p:spPr>
+          <a:xfrm>
+            <a:off x="274320" y="1348740"/>
+            <a:ext cx="1737360" cy="822960"/>
+          </a:xfrm>
+          <a:prstGeom prst="rect">
             <a:avLst/>
           </a:prstGeom>
           <a:solidFill>
             <a:srgbClr val="FCE4D6"/>
           </a:solidFill>
-          <a:ln w="15875">
+          <a:ln w="12700">
             <a:solidFill>
               <a:srgbClr val="1F4E78"/>
             </a:solidFill>
@@ -3254,45 +3369,34 @@
           <a:p>
             <a:pPr algn="ctr"/>
             <a:r>
-              <a:rPr sz="1400" b="1">
-                <a:solidFill>
-                  <a:srgbClr val="202020"/>
-                </a:solidFill>
-              </a:rPr>
-              <a:t>Jira Ticket</a:t>
-            </a:r>
-          </a:p>
-          <a:p>
-            <a:pPr algn="ctr"/>
-            <a:r>
-              <a:rPr sz="1400" b="1">
-                <a:solidFill>
-                  <a:srgbClr val="202020"/>
-                </a:solidFill>
-              </a:rPr>
-              <a:t>(In Progress)</a:t>
-            </a:r>
-          </a:p>
-        </p:txBody>
-      </p:sp>
-      <p:sp>
-        <p:nvSpPr>
-          <p:cNvPr id="4" name="Rounded Rectangle 3"/>
+              <a:rPr sz="1300" b="1">
+                <a:solidFill>
+                  <a:srgbClr val="202020"/>
+                </a:solidFill>
+              </a:rPr>
+              <a:t>1. Triage</a:t>
+            </a:r>
+          </a:p>
+        </p:txBody>
+      </p:sp>
+      <p:sp>
+        <p:nvSpPr>
+          <p:cNvPr id="6" name="Rounded Rectangle 5"/>
           <p:cNvSpPr/>
           <p:nvPr/>
         </p:nvSpPr>
         <p:spPr>
           <a:xfrm>
-            <a:off x="6126480" y="1920240"/>
-            <a:ext cx="2377440" cy="777240"/>
+            <a:off x="2960369" y="1371600"/>
+            <a:ext cx="2926080" cy="777240"/>
           </a:xfrm>
           <a:prstGeom prst="roundRect">
             <a:avLst/>
           </a:prstGeom>
           <a:solidFill>
-            <a:srgbClr val="DEEBF7"/>
+            <a:srgbClr val="FCE4D6"/>
           </a:solidFill>
-          <a:ln w="15875">
+          <a:ln w="12700">
             <a:solidFill>
               <a:srgbClr val="1F4E78"/>
             </a:solidFill>
@@ -3319,45 +3423,45 @@
           <a:p>
             <a:pPr algn="ctr"/>
             <a:r>
-              <a:rPr sz="1400" b="1">
-                <a:solidFill>
-                  <a:srgbClr val="202020"/>
-                </a:solidFill>
-              </a:rPr>
-              <a:t>Orchestrator</a:t>
-            </a:r>
-          </a:p>
-          <a:p>
-            <a:pPr algn="ctr"/>
-            <a:r>
-              <a:rPr sz="1400" b="1">
-                <a:solidFill>
-                  <a:srgbClr val="202020"/>
-                </a:solidFill>
-              </a:rPr>
-              <a:t>Fetch JQL · Drive State</a:t>
-            </a:r>
-          </a:p>
-        </p:txBody>
-      </p:sp>
-      <p:sp>
-        <p:nvSpPr>
-          <p:cNvPr id="5" name="Diamond 4"/>
+              <a:rPr sz="1200" b="1">
+                <a:solidFill>
+                  <a:srgbClr val="202020"/>
+                </a:solidFill>
+              </a:rPr>
+              <a:t>Jira Ticket</a:t>
+            </a:r>
+          </a:p>
+          <a:p>
+            <a:pPr algn="ctr"/>
+            <a:r>
+              <a:rPr sz="1200" b="1">
+                <a:solidFill>
+                  <a:srgbClr val="202020"/>
+                </a:solidFill>
+              </a:rPr>
+              <a:t>(In Progress)</a:t>
+            </a:r>
+          </a:p>
+        </p:txBody>
+      </p:sp>
+      <p:sp>
+        <p:nvSpPr>
+          <p:cNvPr id="7" name="Rounded Rectangle 6"/>
           <p:cNvSpPr/>
           <p:nvPr/>
         </p:nvSpPr>
         <p:spPr>
           <a:xfrm>
-            <a:off x="6126480" y="2926080"/>
-            <a:ext cx="2194560" cy="777240"/>
-          </a:xfrm>
-          <a:prstGeom prst="diamond">
+            <a:off x="6789419" y="1371600"/>
+            <a:ext cx="2926080" cy="777240"/>
+          </a:xfrm>
+          <a:prstGeom prst="roundRect">
             <a:avLst/>
           </a:prstGeom>
           <a:solidFill>
-            <a:srgbClr val="D9D2E9"/>
+            <a:srgbClr val="DEEBF7"/>
           </a:solidFill>
-          <a:ln w="15875">
+          <a:ln w="12700">
             <a:solidFill>
               <a:srgbClr val="1F4E78"/>
             </a:solidFill>
@@ -3384,34 +3488,45 @@
           <a:p>
             <a:pPr algn="ctr"/>
             <a:r>
-              <a:rPr sz="1300" b="1">
-                <a:solidFill>
-                  <a:srgbClr val="202020"/>
-                </a:solidFill>
-              </a:rPr>
-              <a:t>Ambiguous?</a:t>
-            </a:r>
-          </a:p>
-        </p:txBody>
-      </p:sp>
-      <p:sp>
-        <p:nvSpPr>
-          <p:cNvPr id="6" name="Rounded Rectangle 5"/>
+              <a:rPr sz="1200" b="1">
+                <a:solidFill>
+                  <a:srgbClr val="202020"/>
+                </a:solidFill>
+              </a:rPr>
+              <a:t>Orchestrator</a:t>
+            </a:r>
+          </a:p>
+          <a:p>
+            <a:pPr algn="ctr"/>
+            <a:r>
+              <a:rPr sz="1200" b="1">
+                <a:solidFill>
+                  <a:srgbClr val="202020"/>
+                </a:solidFill>
+              </a:rPr>
+              <a:t>polls JQL</a:t>
+            </a:r>
+          </a:p>
+        </p:txBody>
+      </p:sp>
+      <p:sp>
+        <p:nvSpPr>
+          <p:cNvPr id="8" name="Rounded Rectangle 7"/>
           <p:cNvSpPr/>
           <p:nvPr/>
         </p:nvSpPr>
         <p:spPr>
           <a:xfrm>
-            <a:off x="2743200" y="3931920"/>
-            <a:ext cx="2377440" cy="777240"/>
+            <a:off x="10618469" y="1371600"/>
+            <a:ext cx="2926080" cy="777240"/>
           </a:xfrm>
           <a:prstGeom prst="roundRect">
             <a:avLst/>
           </a:prstGeom>
           <a:solidFill>
-            <a:srgbClr val="FFE699"/>
+            <a:srgbClr val="DEEBF7"/>
           </a:solidFill>
-          <a:ln w="15875">
+          <a:ln w="12700">
             <a:solidFill>
               <a:srgbClr val="1F4E78"/>
             </a:solidFill>
@@ -3438,367 +3553,42 @@
           <a:p>
             <a:pPr algn="ctr"/>
             <a:r>
-              <a:rPr sz="1400" b="1">
-                <a:solidFill>
-                  <a:srgbClr val="202020"/>
-                </a:solidFill>
-              </a:rPr>
-              <a:t>Post Questions</a:t>
-            </a:r>
-          </a:p>
-          <a:p>
-            <a:pPr algn="ctr"/>
-            <a:r>
-              <a:rPr sz="1400" b="1">
-                <a:solidFill>
-                  <a:srgbClr val="202020"/>
-                </a:solidFill>
-              </a:rPr>
-              <a:t>(label: ai-questions)</a:t>
-            </a:r>
-          </a:p>
-        </p:txBody>
-      </p:sp>
-      <p:sp>
-        <p:nvSpPr>
-          <p:cNvPr id="7" name="Rounded Rectangle 6"/>
-          <p:cNvSpPr/>
-          <p:nvPr/>
-        </p:nvSpPr>
-        <p:spPr>
-          <a:xfrm>
-            <a:off x="2743200" y="4937760"/>
-            <a:ext cx="2377440" cy="777240"/>
-          </a:xfrm>
-          <a:prstGeom prst="roundRect">
-            <a:avLst/>
-          </a:prstGeom>
-          <a:solidFill>
-            <a:srgbClr val="FFE699"/>
-          </a:solidFill>
-          <a:ln w="15875">
-            <a:solidFill>
-              <a:srgbClr val="1F4E78"/>
-            </a:solidFill>
-          </a:ln>
-          <a:effectLst/>
-        </p:spPr>
-        <p:style>
-          <a:lnRef idx="1">
-            <a:schemeClr val="accent1"/>
-          </a:lnRef>
-          <a:fillRef idx="3">
-            <a:schemeClr val="accent1"/>
-          </a:fillRef>
-          <a:effectRef idx="2">
-            <a:schemeClr val="accent1"/>
-          </a:effectRef>
-          <a:fontRef idx="minor">
-            <a:schemeClr val="lt1"/>
-          </a:fontRef>
-        </p:style>
-        <p:txBody>
-          <a:bodyPr rtlCol="0" anchor="ctr" wrap="square" lIns="73152" rIns="73152" tIns="36576" bIns="36576"/>
-          <a:lstStyle/>
-          <a:p>
-            <a:pPr algn="ctr"/>
-            <a:r>
-              <a:rPr sz="1400" b="1">
-                <a:solidFill>
-                  <a:srgbClr val="202020"/>
-                </a:solidFill>
-              </a:rPr>
-              <a:t>Human Reply</a:t>
-            </a:r>
-          </a:p>
-          <a:p>
-            <a:pPr algn="ctr"/>
-            <a:r>
-              <a:rPr sz="1400" b="1">
-                <a:solidFill>
-                  <a:srgbClr val="202020"/>
-                </a:solidFill>
-              </a:rPr>
-              <a:t>on Jira</a:t>
-            </a:r>
-          </a:p>
-        </p:txBody>
-      </p:sp>
-      <p:sp>
-        <p:nvSpPr>
-          <p:cNvPr id="8" name="Rounded Rectangle 7"/>
-          <p:cNvSpPr/>
-          <p:nvPr/>
-        </p:nvSpPr>
-        <p:spPr>
-          <a:xfrm>
-            <a:off x="9509760" y="3931920"/>
-            <a:ext cx="2377440" cy="777240"/>
-          </a:xfrm>
-          <a:prstGeom prst="roundRect">
-            <a:avLst/>
-          </a:prstGeom>
-          <a:solidFill>
-            <a:srgbClr val="E2EFDA"/>
-          </a:solidFill>
-          <a:ln w="15875">
-            <a:solidFill>
-              <a:srgbClr val="1F4E78"/>
-            </a:solidFill>
-          </a:ln>
-          <a:effectLst/>
-        </p:spPr>
-        <p:style>
-          <a:lnRef idx="1">
-            <a:schemeClr val="accent1"/>
-          </a:lnRef>
-          <a:fillRef idx="3">
-            <a:schemeClr val="accent1"/>
-          </a:fillRef>
-          <a:effectRef idx="2">
-            <a:schemeClr val="accent1"/>
-          </a:effectRef>
-          <a:fontRef idx="minor">
-            <a:schemeClr val="lt1"/>
-          </a:fontRef>
-        </p:style>
-        <p:txBody>
-          <a:bodyPr rtlCol="0" anchor="ctr" wrap="square" lIns="73152" rIns="73152" tIns="36576" bIns="36576"/>
-          <a:lstStyle/>
-          <a:p>
-            <a:pPr algn="ctr"/>
-            <a:r>
-              <a:rPr sz="1400" b="1">
-                <a:solidFill>
-                  <a:srgbClr val="202020"/>
-                </a:solidFill>
-              </a:rPr>
-              <a:t>techlead agent</a:t>
-            </a:r>
-          </a:p>
-          <a:p>
-            <a:pPr algn="ctr"/>
-            <a:r>
-              <a:rPr sz="1400" b="1">
-                <a:solidFill>
-                  <a:srgbClr val="202020"/>
-                </a:solidFill>
-              </a:rPr>
-              <a:t>build plan</a:t>
-            </a:r>
-          </a:p>
-        </p:txBody>
-      </p:sp>
-      <p:sp>
-        <p:nvSpPr>
-          <p:cNvPr id="9" name="Rounded Rectangle 8"/>
-          <p:cNvSpPr/>
-          <p:nvPr/>
-        </p:nvSpPr>
-        <p:spPr>
-          <a:xfrm>
-            <a:off x="9509760" y="4937760"/>
-            <a:ext cx="2377440" cy="777240"/>
-          </a:xfrm>
-          <a:prstGeom prst="roundRect">
-            <a:avLst/>
-          </a:prstGeom>
-          <a:solidFill>
-            <a:srgbClr val="E2EFDA"/>
-          </a:solidFill>
-          <a:ln w="15875">
-            <a:solidFill>
-              <a:srgbClr val="1F4E78"/>
-            </a:solidFill>
-          </a:ln>
-          <a:effectLst/>
-        </p:spPr>
-        <p:style>
-          <a:lnRef idx="1">
-            <a:schemeClr val="accent1"/>
-          </a:lnRef>
-          <a:fillRef idx="3">
-            <a:schemeClr val="accent1"/>
-          </a:fillRef>
-          <a:effectRef idx="2">
-            <a:schemeClr val="accent1"/>
-          </a:effectRef>
-          <a:fontRef idx="minor">
-            <a:schemeClr val="lt1"/>
-          </a:fontRef>
-        </p:style>
-        <p:txBody>
-          <a:bodyPr rtlCol="0" anchor="ctr" wrap="square" lIns="73152" rIns="73152" tIns="36576" bIns="36576"/>
-          <a:lstStyle/>
-          <a:p>
-            <a:pPr algn="ctr"/>
-            <a:r>
-              <a:rPr sz="1400" b="1">
-                <a:solidFill>
-                  <a:srgbClr val="202020"/>
-                </a:solidFill>
-              </a:rPr>
-              <a:t>Post Plan</a:t>
-            </a:r>
-          </a:p>
-          <a:p>
-            <a:pPr algn="ctr"/>
-            <a:r>
-              <a:rPr sz="1400" b="1">
-                <a:solidFill>
-                  <a:srgbClr val="202020"/>
-                </a:solidFill>
-              </a:rPr>
-              <a:t>(label: ai-plan-posted)</a:t>
-            </a:r>
-          </a:p>
-        </p:txBody>
-      </p:sp>
-      <p:sp>
-        <p:nvSpPr>
-          <p:cNvPr id="10" name="Rounded Rectangle 9"/>
-          <p:cNvSpPr/>
-          <p:nvPr/>
-        </p:nvSpPr>
-        <p:spPr>
-          <a:xfrm>
-            <a:off x="6126480" y="5943600"/>
-            <a:ext cx="2377440" cy="777240"/>
-          </a:xfrm>
-          <a:prstGeom prst="roundRect">
-            <a:avLst/>
-          </a:prstGeom>
-          <a:solidFill>
-            <a:srgbClr val="FFE699"/>
-          </a:solidFill>
-          <a:ln w="15875">
-            <a:solidFill>
-              <a:srgbClr val="1F4E78"/>
-            </a:solidFill>
-          </a:ln>
-          <a:effectLst/>
-        </p:spPr>
-        <p:style>
-          <a:lnRef idx="1">
-            <a:schemeClr val="accent1"/>
-          </a:lnRef>
-          <a:fillRef idx="3">
-            <a:schemeClr val="accent1"/>
-          </a:fillRef>
-          <a:effectRef idx="2">
-            <a:schemeClr val="accent1"/>
-          </a:effectRef>
-          <a:fontRef idx="minor">
-            <a:schemeClr val="lt1"/>
-          </a:fontRef>
-        </p:style>
-        <p:txBody>
-          <a:bodyPr rtlCol="0" anchor="ctr" wrap="square" lIns="73152" rIns="73152" tIns="36576" bIns="36576"/>
-          <a:lstStyle/>
-          <a:p>
-            <a:pPr algn="ctr"/>
-            <a:r>
-              <a:rPr sz="1400" b="1">
-                <a:solidFill>
-                  <a:srgbClr val="202020"/>
-                </a:solidFill>
-              </a:rPr>
-              <a:t>Human Approval</a:t>
-            </a:r>
-          </a:p>
-          <a:p>
-            <a:pPr algn="ctr"/>
-            <a:r>
-              <a:rPr sz="1400" b="1">
-                <a:solidFill>
-                  <a:srgbClr val="202020"/>
-                </a:solidFill>
-              </a:rPr>
-              <a:t>('approved' / 'lgtm')</a:t>
-            </a:r>
-          </a:p>
-        </p:txBody>
-      </p:sp>
-      <p:sp>
-        <p:nvSpPr>
-          <p:cNvPr id="11" name="Rounded Rectangle 10"/>
-          <p:cNvSpPr/>
-          <p:nvPr/>
-        </p:nvSpPr>
-        <p:spPr>
-          <a:xfrm>
-            <a:off x="6126480" y="6858000"/>
-            <a:ext cx="2377440" cy="777240"/>
-          </a:xfrm>
-          <a:prstGeom prst="roundRect">
-            <a:avLst/>
-          </a:prstGeom>
-          <a:solidFill>
-            <a:srgbClr val="DEEBF7"/>
-          </a:solidFill>
-          <a:ln w="15875">
-            <a:solidFill>
-              <a:srgbClr val="1F4E78"/>
-            </a:solidFill>
-          </a:ln>
-          <a:effectLst/>
-        </p:spPr>
-        <p:style>
-          <a:lnRef idx="1">
-            <a:schemeClr val="accent1"/>
-          </a:lnRef>
-          <a:fillRef idx="3">
-            <a:schemeClr val="accent1"/>
-          </a:fillRef>
-          <a:effectRef idx="2">
-            <a:schemeClr val="accent1"/>
-          </a:effectRef>
-          <a:fontRef idx="minor">
-            <a:schemeClr val="lt1"/>
-          </a:fontRef>
-        </p:style>
-        <p:txBody>
-          <a:bodyPr rtlCol="0" anchor="ctr" wrap="square" lIns="73152" rIns="73152" tIns="36576" bIns="36576"/>
-          <a:lstStyle/>
-          <a:p>
-            <a:pPr algn="ctr"/>
-            <a:r>
-              <a:rPr sz="1400" b="1">
-                <a:solidFill>
-                  <a:srgbClr val="202020"/>
-                </a:solidFill>
-              </a:rPr>
-              <a:t>Spawn Implementation</a:t>
-            </a:r>
-          </a:p>
-          <a:p>
-            <a:pPr algn="ctr"/>
-            <a:r>
-              <a:rPr sz="1400" b="1">
-                <a:solidFill>
-                  <a:srgbClr val="202020"/>
-                </a:solidFill>
-              </a:rPr>
-              <a:t>(label: ai-in-progress)</a:t>
+              <a:rPr sz="1200" b="1">
+                <a:solidFill>
+                  <a:srgbClr val="202020"/>
+                </a:solidFill>
+              </a:rPr>
+              <a:t>Classify by label</a:t>
+            </a:r>
+          </a:p>
+          <a:p>
+            <a:pPr algn="ctr"/>
+            <a:r>
+              <a:rPr sz="1200" b="1">
+                <a:solidFill>
+                  <a:srgbClr val="202020"/>
+                </a:solidFill>
+              </a:rPr>
+              <a:t>(ai-* state)</a:t>
             </a:r>
           </a:p>
         </p:txBody>
       </p:sp>
       <p:cxnSp>
         <p:nvCxnSpPr>
-          <p:cNvPr id="12" name="Connector 11"/>
+          <p:cNvPr id="9" name="Connector 8"/>
           <p:cNvCxnSpPr/>
           <p:nvPr/>
         </p:nvCxnSpPr>
         <p:spPr>
           <a:xfrm>
-            <a:off x="7315200" y="1691640"/>
-            <a:ext cx="0" cy="228600"/>
+            <a:off x="5932170" y="1760220"/>
+            <a:ext cx="811529" cy="0"/>
           </a:xfrm>
           <a:prstGeom prst="line">
             <a:avLst/>
           </a:prstGeom>
-          <a:ln w="22225">
+          <a:ln w="19050">
             <a:solidFill>
               <a:srgbClr val="1F4E78"/>
             </a:solidFill>
@@ -3822,19 +3612,361 @@
       </p:cxnSp>
       <p:cxnSp>
         <p:nvCxnSpPr>
-          <p:cNvPr id="13" name="Connector 12"/>
+          <p:cNvPr id="10" name="Connector 9"/>
           <p:cNvCxnSpPr/>
           <p:nvPr/>
         </p:nvCxnSpPr>
         <p:spPr>
           <a:xfrm>
-            <a:off x="7315200" y="2697480"/>
-            <a:ext cx="0" cy="228600"/>
+            <a:off x="9761220" y="1760220"/>
+            <a:ext cx="811529" cy="0"/>
           </a:xfrm>
           <a:prstGeom prst="line">
             <a:avLst/>
           </a:prstGeom>
-          <a:ln w="22225">
+          <a:ln w="19050">
+            <a:solidFill>
+              <a:srgbClr val="1F4E78"/>
+            </a:solidFill>
+            <a:tailEnd type="triangle" w="med" h="med"/>
+          </a:ln>
+        </p:spPr>
+        <p:style>
+          <a:lnRef idx="2">
+            <a:schemeClr val="accent1"/>
+          </a:lnRef>
+          <a:fillRef idx="0">
+            <a:schemeClr val="accent1"/>
+          </a:fillRef>
+          <a:effectRef idx="1">
+            <a:schemeClr val="accent1"/>
+          </a:effectRef>
+          <a:fontRef idx="minor">
+            <a:schemeClr val="tx1"/>
+          </a:fontRef>
+        </p:style>
+      </p:cxnSp>
+      <p:sp>
+        <p:nvSpPr>
+          <p:cNvPr id="11" name="Rectangle 10"/>
+          <p:cNvSpPr/>
+          <p:nvPr/>
+        </p:nvSpPr>
+        <p:spPr>
+          <a:xfrm>
+            <a:off x="182880" y="2331720"/>
+            <a:ext cx="14264640" cy="1051560"/>
+          </a:xfrm>
+          <a:prstGeom prst="rect">
+            <a:avLst/>
+          </a:prstGeom>
+          <a:solidFill>
+            <a:srgbClr val="F7F7F7"/>
+          </a:solidFill>
+          <a:ln w="6350">
+            <a:solidFill>
+              <a:srgbClr val="CCCCCC"/>
+            </a:solidFill>
+          </a:ln>
+          <a:effectLst/>
+        </p:spPr>
+        <p:style>
+          <a:lnRef idx="1">
+            <a:schemeClr val="accent1"/>
+          </a:lnRef>
+          <a:fillRef idx="3">
+            <a:schemeClr val="accent1"/>
+          </a:fillRef>
+          <a:effectRef idx="2">
+            <a:schemeClr val="accent1"/>
+          </a:effectRef>
+          <a:fontRef idx="minor">
+            <a:schemeClr val="lt1"/>
+          </a:fontRef>
+        </p:style>
+        <p:txBody>
+          <a:bodyPr rtlCol="0" anchor="ctr"/>
+          <a:lstStyle/>
+          <a:p>
+            <a:pPr algn="ctr"/>
+          </a:p>
+        </p:txBody>
+      </p:sp>
+      <p:sp>
+        <p:nvSpPr>
+          <p:cNvPr id="12" name="Rectangle 11"/>
+          <p:cNvSpPr/>
+          <p:nvPr/>
+        </p:nvSpPr>
+        <p:spPr>
+          <a:xfrm>
+            <a:off x="274320" y="2446020"/>
+            <a:ext cx="1737360" cy="822960"/>
+          </a:xfrm>
+          <a:prstGeom prst="rect">
+            <a:avLst/>
+          </a:prstGeom>
+          <a:solidFill>
+            <a:srgbClr val="FFE699"/>
+          </a:solidFill>
+          <a:ln w="12700">
+            <a:solidFill>
+              <a:srgbClr val="1F4E78"/>
+            </a:solidFill>
+          </a:ln>
+          <a:effectLst/>
+        </p:spPr>
+        <p:style>
+          <a:lnRef idx="1">
+            <a:schemeClr val="accent1"/>
+          </a:lnRef>
+          <a:fillRef idx="3">
+            <a:schemeClr val="accent1"/>
+          </a:fillRef>
+          <a:effectRef idx="2">
+            <a:schemeClr val="accent1"/>
+          </a:effectRef>
+          <a:fontRef idx="minor">
+            <a:schemeClr val="lt1"/>
+          </a:fontRef>
+        </p:style>
+        <p:txBody>
+          <a:bodyPr rtlCol="0" anchor="ctr" wrap="square" lIns="73152" rIns="73152" tIns="36576" bIns="36576"/>
+          <a:lstStyle/>
+          <a:p>
+            <a:pPr algn="ctr"/>
+            <a:r>
+              <a:rPr sz="1300" b="1">
+                <a:solidFill>
+                  <a:srgbClr val="202020"/>
+                </a:solidFill>
+              </a:rPr>
+              <a:t>2. Clarify</a:t>
+            </a:r>
+          </a:p>
+          <a:p>
+            <a:pPr algn="ctr"/>
+            <a:r>
+              <a:rPr sz="1300" b="1">
+                <a:solidFill>
+                  <a:srgbClr val="202020"/>
+                </a:solidFill>
+              </a:rPr>
+              <a:t>(if ambiguous)</a:t>
+            </a:r>
+          </a:p>
+        </p:txBody>
+      </p:sp>
+      <p:sp>
+        <p:nvSpPr>
+          <p:cNvPr id="13" name="Rounded Rectangle 12"/>
+          <p:cNvSpPr/>
+          <p:nvPr/>
+        </p:nvSpPr>
+        <p:spPr>
+          <a:xfrm>
+            <a:off x="2960369" y="2468879"/>
+            <a:ext cx="2926080" cy="777240"/>
+          </a:xfrm>
+          <a:prstGeom prst="roundRect">
+            <a:avLst/>
+          </a:prstGeom>
+          <a:solidFill>
+            <a:srgbClr val="FFE699"/>
+          </a:solidFill>
+          <a:ln w="12700">
+            <a:solidFill>
+              <a:srgbClr val="1F4E78"/>
+            </a:solidFill>
+          </a:ln>
+          <a:effectLst/>
+        </p:spPr>
+        <p:style>
+          <a:lnRef idx="1">
+            <a:schemeClr val="accent1"/>
+          </a:lnRef>
+          <a:fillRef idx="3">
+            <a:schemeClr val="accent1"/>
+          </a:fillRef>
+          <a:effectRef idx="2">
+            <a:schemeClr val="accent1"/>
+          </a:effectRef>
+          <a:fontRef idx="minor">
+            <a:schemeClr val="lt1"/>
+          </a:fontRef>
+        </p:style>
+        <p:txBody>
+          <a:bodyPr rtlCol="0" anchor="ctr" wrap="square" lIns="73152" rIns="73152" tIns="36576" bIns="36576"/>
+          <a:lstStyle/>
+          <a:p>
+            <a:pPr algn="ctr"/>
+            <a:r>
+              <a:rPr sz="1200" b="1">
+                <a:solidFill>
+                  <a:srgbClr val="202020"/>
+                </a:solidFill>
+              </a:rPr>
+              <a:t>Post Questions</a:t>
+            </a:r>
+          </a:p>
+          <a:p>
+            <a:pPr algn="ctr"/>
+            <a:r>
+              <a:rPr sz="1200" b="1">
+                <a:solidFill>
+                  <a:srgbClr val="202020"/>
+                </a:solidFill>
+              </a:rPr>
+              <a:t>label: ai-questions</a:t>
+            </a:r>
+          </a:p>
+        </p:txBody>
+      </p:sp>
+      <p:sp>
+        <p:nvSpPr>
+          <p:cNvPr id="14" name="Rounded Rectangle 13"/>
+          <p:cNvSpPr/>
+          <p:nvPr/>
+        </p:nvSpPr>
+        <p:spPr>
+          <a:xfrm>
+            <a:off x="6789419" y="2468879"/>
+            <a:ext cx="2926080" cy="777240"/>
+          </a:xfrm>
+          <a:prstGeom prst="roundRect">
+            <a:avLst/>
+          </a:prstGeom>
+          <a:solidFill>
+            <a:srgbClr val="FFE699"/>
+          </a:solidFill>
+          <a:ln w="12700">
+            <a:solidFill>
+              <a:srgbClr val="1F4E78"/>
+            </a:solidFill>
+          </a:ln>
+          <a:effectLst/>
+        </p:spPr>
+        <p:style>
+          <a:lnRef idx="1">
+            <a:schemeClr val="accent1"/>
+          </a:lnRef>
+          <a:fillRef idx="3">
+            <a:schemeClr val="accent1"/>
+          </a:fillRef>
+          <a:effectRef idx="2">
+            <a:schemeClr val="accent1"/>
+          </a:effectRef>
+          <a:fontRef idx="minor">
+            <a:schemeClr val="lt1"/>
+          </a:fontRef>
+        </p:style>
+        <p:txBody>
+          <a:bodyPr rtlCol="0" anchor="ctr" wrap="square" lIns="73152" rIns="73152" tIns="36576" bIns="36576"/>
+          <a:lstStyle/>
+          <a:p>
+            <a:pPr algn="ctr"/>
+            <a:r>
+              <a:rPr sz="1200" b="1">
+                <a:solidFill>
+                  <a:srgbClr val="202020"/>
+                </a:solidFill>
+              </a:rPr>
+              <a:t>Human Reply</a:t>
+            </a:r>
+          </a:p>
+          <a:p>
+            <a:pPr algn="ctr"/>
+            <a:r>
+              <a:rPr sz="1200" b="1">
+                <a:solidFill>
+                  <a:srgbClr val="202020"/>
+                </a:solidFill>
+              </a:rPr>
+              <a:t>on Jira ticket</a:t>
+            </a:r>
+          </a:p>
+        </p:txBody>
+      </p:sp>
+      <p:sp>
+        <p:nvSpPr>
+          <p:cNvPr id="15" name="Rounded Rectangle 14"/>
+          <p:cNvSpPr/>
+          <p:nvPr/>
+        </p:nvSpPr>
+        <p:spPr>
+          <a:xfrm>
+            <a:off x="10618469" y="2468879"/>
+            <a:ext cx="2926080" cy="777240"/>
+          </a:xfrm>
+          <a:prstGeom prst="roundRect">
+            <a:avLst/>
+          </a:prstGeom>
+          <a:solidFill>
+            <a:srgbClr val="E2EFDA"/>
+          </a:solidFill>
+          <a:ln w="12700">
+            <a:solidFill>
+              <a:srgbClr val="1F4E78"/>
+            </a:solidFill>
+          </a:ln>
+          <a:effectLst/>
+        </p:spPr>
+        <p:style>
+          <a:lnRef idx="1">
+            <a:schemeClr val="accent1"/>
+          </a:lnRef>
+          <a:fillRef idx="3">
+            <a:schemeClr val="accent1"/>
+          </a:fillRef>
+          <a:effectRef idx="2">
+            <a:schemeClr val="accent1"/>
+          </a:effectRef>
+          <a:fontRef idx="minor">
+            <a:schemeClr val="lt1"/>
+          </a:fontRef>
+        </p:style>
+        <p:txBody>
+          <a:bodyPr rtlCol="0" anchor="ctr" wrap="square" lIns="73152" rIns="73152" tIns="36576" bIns="36576"/>
+          <a:lstStyle/>
+          <a:p>
+            <a:pPr algn="ctr"/>
+            <a:r>
+              <a:rPr sz="1200" b="1">
+                <a:solidFill>
+                  <a:srgbClr val="202020"/>
+                </a:solidFill>
+              </a:rPr>
+              <a:t>Replies feed</a:t>
+            </a:r>
+          </a:p>
+          <a:p>
+            <a:pPr algn="ctr"/>
+            <a:r>
+              <a:rPr sz="1200" b="1">
+                <a:solidFill>
+                  <a:srgbClr val="202020"/>
+                </a:solidFill>
+              </a:rPr>
+              <a:t>techlead next run</a:t>
+            </a:r>
+          </a:p>
+        </p:txBody>
+      </p:sp>
+      <p:cxnSp>
+        <p:nvCxnSpPr>
+          <p:cNvPr id="16" name="Connector 15"/>
+          <p:cNvCxnSpPr/>
+          <p:nvPr/>
+        </p:nvCxnSpPr>
+        <p:spPr>
+          <a:xfrm>
+            <a:off x="5932170" y="2857499"/>
+            <a:ext cx="811529" cy="0"/>
+          </a:xfrm>
+          <a:prstGeom prst="line">
+            <a:avLst/>
+          </a:prstGeom>
+          <a:ln w="19050">
             <a:solidFill>
               <a:srgbClr val="1F4E78"/>
             </a:solidFill>
@@ -3858,19 +3990,350 @@
       </p:cxnSp>
       <p:cxnSp>
         <p:nvCxnSpPr>
-          <p:cNvPr id="14" name="Connector 13"/>
+          <p:cNvPr id="17" name="Connector 16"/>
           <p:cNvCxnSpPr/>
           <p:nvPr/>
         </p:nvCxnSpPr>
         <p:spPr>
-          <a:xfrm flipH="1">
-            <a:off x="3931920" y="3314700"/>
-            <a:ext cx="2194560" cy="617220"/>
+          <a:xfrm>
+            <a:off x="9761220" y="2857499"/>
+            <a:ext cx="811529" cy="0"/>
           </a:xfrm>
           <a:prstGeom prst="line">
             <a:avLst/>
           </a:prstGeom>
-          <a:ln w="22225">
+          <a:ln w="19050">
+            <a:solidFill>
+              <a:srgbClr val="1F4E78"/>
+            </a:solidFill>
+            <a:tailEnd type="triangle" w="med" h="med"/>
+          </a:ln>
+        </p:spPr>
+        <p:style>
+          <a:lnRef idx="2">
+            <a:schemeClr val="accent1"/>
+          </a:lnRef>
+          <a:fillRef idx="0">
+            <a:schemeClr val="accent1"/>
+          </a:fillRef>
+          <a:effectRef idx="1">
+            <a:schemeClr val="accent1"/>
+          </a:effectRef>
+          <a:fontRef idx="minor">
+            <a:schemeClr val="tx1"/>
+          </a:fontRef>
+        </p:style>
+      </p:cxnSp>
+      <p:sp>
+        <p:nvSpPr>
+          <p:cNvPr id="18" name="Rectangle 17"/>
+          <p:cNvSpPr/>
+          <p:nvPr/>
+        </p:nvSpPr>
+        <p:spPr>
+          <a:xfrm>
+            <a:off x="182880" y="3429000"/>
+            <a:ext cx="14264640" cy="1051560"/>
+          </a:xfrm>
+          <a:prstGeom prst="rect">
+            <a:avLst/>
+          </a:prstGeom>
+          <a:solidFill>
+            <a:srgbClr val="F7F7F7"/>
+          </a:solidFill>
+          <a:ln w="6350">
+            <a:solidFill>
+              <a:srgbClr val="CCCCCC"/>
+            </a:solidFill>
+          </a:ln>
+          <a:effectLst/>
+        </p:spPr>
+        <p:style>
+          <a:lnRef idx="1">
+            <a:schemeClr val="accent1"/>
+          </a:lnRef>
+          <a:fillRef idx="3">
+            <a:schemeClr val="accent1"/>
+          </a:fillRef>
+          <a:effectRef idx="2">
+            <a:schemeClr val="accent1"/>
+          </a:effectRef>
+          <a:fontRef idx="minor">
+            <a:schemeClr val="lt1"/>
+          </a:fontRef>
+        </p:style>
+        <p:txBody>
+          <a:bodyPr rtlCol="0" anchor="ctr"/>
+          <a:lstStyle/>
+          <a:p>
+            <a:pPr algn="ctr"/>
+          </a:p>
+        </p:txBody>
+      </p:sp>
+      <p:sp>
+        <p:nvSpPr>
+          <p:cNvPr id="19" name="Rectangle 18"/>
+          <p:cNvSpPr/>
+          <p:nvPr/>
+        </p:nvSpPr>
+        <p:spPr>
+          <a:xfrm>
+            <a:off x="274320" y="3543300"/>
+            <a:ext cx="1737360" cy="822960"/>
+          </a:xfrm>
+          <a:prstGeom prst="rect">
+            <a:avLst/>
+          </a:prstGeom>
+          <a:solidFill>
+            <a:srgbClr val="E2EFDA"/>
+          </a:solidFill>
+          <a:ln w="12700">
+            <a:solidFill>
+              <a:srgbClr val="1F4E78"/>
+            </a:solidFill>
+          </a:ln>
+          <a:effectLst/>
+        </p:spPr>
+        <p:style>
+          <a:lnRef idx="1">
+            <a:schemeClr val="accent1"/>
+          </a:lnRef>
+          <a:fillRef idx="3">
+            <a:schemeClr val="accent1"/>
+          </a:fillRef>
+          <a:effectRef idx="2">
+            <a:schemeClr val="accent1"/>
+          </a:effectRef>
+          <a:fontRef idx="minor">
+            <a:schemeClr val="lt1"/>
+          </a:fontRef>
+        </p:style>
+        <p:txBody>
+          <a:bodyPr rtlCol="0" anchor="ctr" wrap="square" lIns="73152" rIns="73152" tIns="36576" bIns="36576"/>
+          <a:lstStyle/>
+          <a:p>
+            <a:pPr algn="ctr"/>
+            <a:r>
+              <a:rPr sz="1300" b="1">
+                <a:solidFill>
+                  <a:srgbClr val="202020"/>
+                </a:solidFill>
+              </a:rPr>
+              <a:t>3. Plan</a:t>
+            </a:r>
+          </a:p>
+        </p:txBody>
+      </p:sp>
+      <p:sp>
+        <p:nvSpPr>
+          <p:cNvPr id="20" name="Rounded Rectangle 19"/>
+          <p:cNvSpPr/>
+          <p:nvPr/>
+        </p:nvSpPr>
+        <p:spPr>
+          <a:xfrm>
+            <a:off x="2960369" y="3566160"/>
+            <a:ext cx="2926080" cy="777240"/>
+          </a:xfrm>
+          <a:prstGeom prst="roundRect">
+            <a:avLst/>
+          </a:prstGeom>
+          <a:solidFill>
+            <a:srgbClr val="E2EFDA"/>
+          </a:solidFill>
+          <a:ln w="12700">
+            <a:solidFill>
+              <a:srgbClr val="1F4E78"/>
+            </a:solidFill>
+          </a:ln>
+          <a:effectLst/>
+        </p:spPr>
+        <p:style>
+          <a:lnRef idx="1">
+            <a:schemeClr val="accent1"/>
+          </a:lnRef>
+          <a:fillRef idx="3">
+            <a:schemeClr val="accent1"/>
+          </a:fillRef>
+          <a:effectRef idx="2">
+            <a:schemeClr val="accent1"/>
+          </a:effectRef>
+          <a:fontRef idx="minor">
+            <a:schemeClr val="lt1"/>
+          </a:fontRef>
+        </p:style>
+        <p:txBody>
+          <a:bodyPr rtlCol="0" anchor="ctr" wrap="square" lIns="73152" rIns="73152" tIns="36576" bIns="36576"/>
+          <a:lstStyle/>
+          <a:p>
+            <a:pPr algn="ctr"/>
+            <a:r>
+              <a:rPr sz="1200" b="1">
+                <a:solidFill>
+                  <a:srgbClr val="202020"/>
+                </a:solidFill>
+              </a:rPr>
+              <a:t>techlead agent</a:t>
+            </a:r>
+          </a:p>
+          <a:p>
+            <a:pPr algn="ctr"/>
+            <a:r>
+              <a:rPr sz="1200" b="1">
+                <a:solidFill>
+                  <a:srgbClr val="202020"/>
+                </a:solidFill>
+              </a:rPr>
+              <a:t>generates plan</a:t>
+            </a:r>
+          </a:p>
+        </p:txBody>
+      </p:sp>
+      <p:sp>
+        <p:nvSpPr>
+          <p:cNvPr id="21" name="Rounded Rectangle 20"/>
+          <p:cNvSpPr/>
+          <p:nvPr/>
+        </p:nvSpPr>
+        <p:spPr>
+          <a:xfrm>
+            <a:off x="6789419" y="3566160"/>
+            <a:ext cx="2926080" cy="777240"/>
+          </a:xfrm>
+          <a:prstGeom prst="roundRect">
+            <a:avLst/>
+          </a:prstGeom>
+          <a:solidFill>
+            <a:srgbClr val="E2EFDA"/>
+          </a:solidFill>
+          <a:ln w="12700">
+            <a:solidFill>
+              <a:srgbClr val="1F4E78"/>
+            </a:solidFill>
+          </a:ln>
+          <a:effectLst/>
+        </p:spPr>
+        <p:style>
+          <a:lnRef idx="1">
+            <a:schemeClr val="accent1"/>
+          </a:lnRef>
+          <a:fillRef idx="3">
+            <a:schemeClr val="accent1"/>
+          </a:fillRef>
+          <a:effectRef idx="2">
+            <a:schemeClr val="accent1"/>
+          </a:effectRef>
+          <a:fontRef idx="minor">
+            <a:schemeClr val="lt1"/>
+          </a:fontRef>
+        </p:style>
+        <p:txBody>
+          <a:bodyPr rtlCol="0" anchor="ctr" wrap="square" lIns="73152" rIns="73152" tIns="36576" bIns="36576"/>
+          <a:lstStyle/>
+          <a:p>
+            <a:pPr algn="ctr"/>
+            <a:r>
+              <a:rPr sz="1200" b="1">
+                <a:solidFill>
+                  <a:srgbClr val="202020"/>
+                </a:solidFill>
+              </a:rPr>
+              <a:t>Post Plan</a:t>
+            </a:r>
+          </a:p>
+          <a:p>
+            <a:pPr algn="ctr"/>
+            <a:r>
+              <a:rPr sz="1200" b="1">
+                <a:solidFill>
+                  <a:srgbClr val="202020"/>
+                </a:solidFill>
+              </a:rPr>
+              <a:t>label: ai-plan-posted</a:t>
+            </a:r>
+          </a:p>
+        </p:txBody>
+      </p:sp>
+      <p:sp>
+        <p:nvSpPr>
+          <p:cNvPr id="22" name="Rounded Rectangle 21"/>
+          <p:cNvSpPr/>
+          <p:nvPr/>
+        </p:nvSpPr>
+        <p:spPr>
+          <a:xfrm>
+            <a:off x="10618469" y="3566160"/>
+            <a:ext cx="2926080" cy="777240"/>
+          </a:xfrm>
+          <a:prstGeom prst="roundRect">
+            <a:avLst/>
+          </a:prstGeom>
+          <a:solidFill>
+            <a:srgbClr val="FFE699"/>
+          </a:solidFill>
+          <a:ln w="12700">
+            <a:solidFill>
+              <a:srgbClr val="1F4E78"/>
+            </a:solidFill>
+          </a:ln>
+          <a:effectLst/>
+        </p:spPr>
+        <p:style>
+          <a:lnRef idx="1">
+            <a:schemeClr val="accent1"/>
+          </a:lnRef>
+          <a:fillRef idx="3">
+            <a:schemeClr val="accent1"/>
+          </a:fillRef>
+          <a:effectRef idx="2">
+            <a:schemeClr val="accent1"/>
+          </a:effectRef>
+          <a:fontRef idx="minor">
+            <a:schemeClr val="lt1"/>
+          </a:fontRef>
+        </p:style>
+        <p:txBody>
+          <a:bodyPr rtlCol="0" anchor="ctr" wrap="square" lIns="73152" rIns="73152" tIns="36576" bIns="36576"/>
+          <a:lstStyle/>
+          <a:p>
+            <a:pPr algn="ctr"/>
+            <a:r>
+              <a:rPr sz="1200" b="1">
+                <a:solidFill>
+                  <a:srgbClr val="202020"/>
+                </a:solidFill>
+              </a:rPr>
+              <a:t>Human Approval</a:t>
+            </a:r>
+          </a:p>
+          <a:p>
+            <a:pPr algn="ctr"/>
+            <a:r>
+              <a:rPr sz="1200" b="1">
+                <a:solidFill>
+                  <a:srgbClr val="202020"/>
+                </a:solidFill>
+              </a:rPr>
+              <a:t>('approved' / 'lgtm')</a:t>
+            </a:r>
+          </a:p>
+        </p:txBody>
+      </p:sp>
+      <p:cxnSp>
+        <p:nvCxnSpPr>
+          <p:cNvPr id="23" name="Connector 22"/>
+          <p:cNvCxnSpPr/>
+          <p:nvPr/>
+        </p:nvCxnSpPr>
+        <p:spPr>
+          <a:xfrm>
+            <a:off x="5932170" y="3954780"/>
+            <a:ext cx="811529" cy="0"/>
+          </a:xfrm>
+          <a:prstGeom prst="line">
+            <a:avLst/>
+          </a:prstGeom>
+          <a:ln w="19050">
             <a:solidFill>
               <a:srgbClr val="1F4E78"/>
             </a:solidFill>
@@ -3894,19 +4357,19 @@
       </p:cxnSp>
       <p:cxnSp>
         <p:nvCxnSpPr>
-          <p:cNvPr id="15" name="Connector 14"/>
+          <p:cNvPr id="24" name="Connector 23"/>
           <p:cNvCxnSpPr/>
           <p:nvPr/>
         </p:nvCxnSpPr>
         <p:spPr>
           <a:xfrm>
-            <a:off x="8321040" y="3314700"/>
-            <a:ext cx="2377440" cy="617220"/>
+            <a:off x="9761220" y="3954780"/>
+            <a:ext cx="811529" cy="0"/>
           </a:xfrm>
           <a:prstGeom prst="line">
             <a:avLst/>
           </a:prstGeom>
-          <a:ln w="22225">
+          <a:ln w="19050">
             <a:solidFill>
               <a:srgbClr val="1F4E78"/>
             </a:solidFill>
@@ -3930,87 +4393,314 @@
       </p:cxnSp>
       <p:sp>
         <p:nvSpPr>
-          <p:cNvPr id="16" name="TextBox 15"/>
-          <p:cNvSpPr txBox="1"/>
-          <p:nvPr/>
-        </p:nvSpPr>
-        <p:spPr>
-          <a:xfrm>
-            <a:off x="5166359" y="3086100"/>
-            <a:ext cx="1371600" cy="274320"/>
+          <p:cNvPr id="25" name="Rectangle 24"/>
+          <p:cNvSpPr/>
+          <p:nvPr/>
+        </p:nvSpPr>
+        <p:spPr>
+          <a:xfrm>
+            <a:off x="182880" y="4526279"/>
+            <a:ext cx="14264640" cy="1051560"/>
           </a:xfrm>
           <a:prstGeom prst="rect">
             <a:avLst/>
           </a:prstGeom>
-          <a:noFill/>
-        </p:spPr>
-        <p:txBody>
-          <a:bodyPr wrap="none" lIns="18288" rIns="18288" tIns="0" bIns="0">
-            <a:spAutoFit/>
-          </a:bodyPr>
-          <a:lstStyle/>
-          <a:p>
-            <a:pPr algn="ctr"/>
-            <a:r>
-              <a:rPr sz="1100" b="1">
-                <a:solidFill>
-                  <a:srgbClr val="C00000"/>
-                </a:solidFill>
-              </a:rPr>
-              <a:t>YES</a:t>
-            </a:r>
-          </a:p>
-        </p:txBody>
-      </p:sp>
-      <p:sp>
-        <p:nvSpPr>
-          <p:cNvPr id="17" name="TextBox 16"/>
-          <p:cNvSpPr txBox="1"/>
-          <p:nvPr/>
-        </p:nvSpPr>
-        <p:spPr>
-          <a:xfrm>
-            <a:off x="8092440" y="3086100"/>
-            <a:ext cx="1371600" cy="274320"/>
+          <a:solidFill>
+            <a:srgbClr val="F7F7F7"/>
+          </a:solidFill>
+          <a:ln w="6350">
+            <a:solidFill>
+              <a:srgbClr val="CCCCCC"/>
+            </a:solidFill>
+          </a:ln>
+          <a:effectLst/>
+        </p:spPr>
+        <p:style>
+          <a:lnRef idx="1">
+            <a:schemeClr val="accent1"/>
+          </a:lnRef>
+          <a:fillRef idx="3">
+            <a:schemeClr val="accent1"/>
+          </a:fillRef>
+          <a:effectRef idx="2">
+            <a:schemeClr val="accent1"/>
+          </a:effectRef>
+          <a:fontRef idx="minor">
+            <a:schemeClr val="lt1"/>
+          </a:fontRef>
+        </p:style>
+        <p:txBody>
+          <a:bodyPr rtlCol="0" anchor="ctr"/>
+          <a:lstStyle/>
+          <a:p>
+            <a:pPr algn="ctr"/>
+          </a:p>
+        </p:txBody>
+      </p:sp>
+      <p:sp>
+        <p:nvSpPr>
+          <p:cNvPr id="26" name="Rectangle 25"/>
+          <p:cNvSpPr/>
+          <p:nvPr/>
+        </p:nvSpPr>
+        <p:spPr>
+          <a:xfrm>
+            <a:off x="274320" y="4640579"/>
+            <a:ext cx="1737360" cy="822960"/>
           </a:xfrm>
           <a:prstGeom prst="rect">
             <a:avLst/>
           </a:prstGeom>
-          <a:noFill/>
-        </p:spPr>
-        <p:txBody>
-          <a:bodyPr wrap="none" lIns="18288" rIns="18288" tIns="0" bIns="0">
-            <a:spAutoFit/>
-          </a:bodyPr>
-          <a:lstStyle/>
-          <a:p>
-            <a:pPr algn="ctr"/>
-            <a:r>
-              <a:rPr sz="1100" b="1">
-                <a:solidFill>
-                  <a:srgbClr val="006E2E"/>
-                </a:solidFill>
-              </a:rPr>
-              <a:t>NO</a:t>
+          <a:solidFill>
+            <a:srgbClr val="FFF2CC"/>
+          </a:solidFill>
+          <a:ln w="12700">
+            <a:solidFill>
+              <a:srgbClr val="1F4E78"/>
+            </a:solidFill>
+          </a:ln>
+          <a:effectLst/>
+        </p:spPr>
+        <p:style>
+          <a:lnRef idx="1">
+            <a:schemeClr val="accent1"/>
+          </a:lnRef>
+          <a:fillRef idx="3">
+            <a:schemeClr val="accent1"/>
+          </a:fillRef>
+          <a:effectRef idx="2">
+            <a:schemeClr val="accent1"/>
+          </a:effectRef>
+          <a:fontRef idx="minor">
+            <a:schemeClr val="lt1"/>
+          </a:fontRef>
+        </p:style>
+        <p:txBody>
+          <a:bodyPr rtlCol="0" anchor="ctr" wrap="square" lIns="73152" rIns="73152" tIns="36576" bIns="36576"/>
+          <a:lstStyle/>
+          <a:p>
+            <a:pPr algn="ctr"/>
+            <a:r>
+              <a:rPr sz="1300" b="1">
+                <a:solidFill>
+                  <a:srgbClr val="202020"/>
+                </a:solidFill>
+              </a:rPr>
+              <a:t>4. Build</a:t>
+            </a:r>
+          </a:p>
+        </p:txBody>
+      </p:sp>
+      <p:sp>
+        <p:nvSpPr>
+          <p:cNvPr id="27" name="Rounded Rectangle 26"/>
+          <p:cNvSpPr/>
+          <p:nvPr/>
+        </p:nvSpPr>
+        <p:spPr>
+          <a:xfrm>
+            <a:off x="2960369" y="4663440"/>
+            <a:ext cx="2926080" cy="777240"/>
+          </a:xfrm>
+          <a:prstGeom prst="roundRect">
+            <a:avLst/>
+          </a:prstGeom>
+          <a:solidFill>
+            <a:srgbClr val="FFF2CC"/>
+          </a:solidFill>
+          <a:ln w="12700">
+            <a:solidFill>
+              <a:srgbClr val="1F4E78"/>
+            </a:solidFill>
+          </a:ln>
+          <a:effectLst/>
+        </p:spPr>
+        <p:style>
+          <a:lnRef idx="1">
+            <a:schemeClr val="accent1"/>
+          </a:lnRef>
+          <a:fillRef idx="3">
+            <a:schemeClr val="accent1"/>
+          </a:fillRef>
+          <a:effectRef idx="2">
+            <a:schemeClr val="accent1"/>
+          </a:effectRef>
+          <a:fontRef idx="minor">
+            <a:schemeClr val="lt1"/>
+          </a:fontRef>
+        </p:style>
+        <p:txBody>
+          <a:bodyPr rtlCol="0" anchor="ctr" wrap="square" lIns="73152" rIns="73152" tIns="36576" bIns="36576"/>
+          <a:lstStyle/>
+          <a:p>
+            <a:pPr algn="ctr"/>
+            <a:r>
+              <a:rPr sz="1200" b="1">
+                <a:solidFill>
+                  <a:srgbClr val="202020"/>
+                </a:solidFill>
+              </a:rPr>
+              <a:t>contract</a:t>
+            </a:r>
+          </a:p>
+          <a:p>
+            <a:pPr algn="ctr"/>
+            <a:r>
+              <a:rPr sz="1200" b="1">
+                <a:solidFill>
+                  <a:srgbClr val="202020"/>
+                </a:solidFill>
+              </a:rPr>
+              <a:t>metadata + APIs</a:t>
+            </a:r>
+          </a:p>
+        </p:txBody>
+      </p:sp>
+      <p:sp>
+        <p:nvSpPr>
+          <p:cNvPr id="28" name="Rounded Rectangle 27"/>
+          <p:cNvSpPr/>
+          <p:nvPr/>
+        </p:nvSpPr>
+        <p:spPr>
+          <a:xfrm>
+            <a:off x="6789419" y="4663440"/>
+            <a:ext cx="2926080" cy="777240"/>
+          </a:xfrm>
+          <a:prstGeom prst="roundRect">
+            <a:avLst/>
+          </a:prstGeom>
+          <a:solidFill>
+            <a:srgbClr val="FFF2CC"/>
+          </a:solidFill>
+          <a:ln w="12700">
+            <a:solidFill>
+              <a:srgbClr val="1F4E78"/>
+            </a:solidFill>
+          </a:ln>
+          <a:effectLst/>
+        </p:spPr>
+        <p:style>
+          <a:lnRef idx="1">
+            <a:schemeClr val="accent1"/>
+          </a:lnRef>
+          <a:fillRef idx="3">
+            <a:schemeClr val="accent1"/>
+          </a:fillRef>
+          <a:effectRef idx="2">
+            <a:schemeClr val="accent1"/>
+          </a:effectRef>
+          <a:fontRef idx="minor">
+            <a:schemeClr val="lt1"/>
+          </a:fontRef>
+        </p:style>
+        <p:txBody>
+          <a:bodyPr rtlCol="0" anchor="ctr" wrap="square" lIns="73152" rIns="73152" tIns="36576" bIns="36576"/>
+          <a:lstStyle/>
+          <a:p>
+            <a:pPr algn="ctr"/>
+            <a:r>
+              <a:rPr sz="1200" b="1">
+                <a:solidFill>
+                  <a:srgbClr val="202020"/>
+                </a:solidFill>
+              </a:rPr>
+              <a:t>backend</a:t>
+            </a:r>
+          </a:p>
+          <a:p>
+            <a:pPr algn="ctr"/>
+            <a:r>
+              <a:rPr sz="1200" b="1">
+                <a:solidFill>
+                  <a:srgbClr val="202020"/>
+                </a:solidFill>
+              </a:rPr>
+              <a:t>Apex · Flows</a:t>
+            </a:r>
+          </a:p>
+        </p:txBody>
+      </p:sp>
+      <p:sp>
+        <p:nvSpPr>
+          <p:cNvPr id="29" name="Rounded Rectangle 28"/>
+          <p:cNvSpPr/>
+          <p:nvPr/>
+        </p:nvSpPr>
+        <p:spPr>
+          <a:xfrm>
+            <a:off x="10618469" y="4663440"/>
+            <a:ext cx="2926080" cy="777240"/>
+          </a:xfrm>
+          <a:prstGeom prst="roundRect">
+            <a:avLst/>
+          </a:prstGeom>
+          <a:solidFill>
+            <a:srgbClr val="FFF2CC"/>
+          </a:solidFill>
+          <a:ln w="12700">
+            <a:solidFill>
+              <a:srgbClr val="1F4E78"/>
+            </a:solidFill>
+          </a:ln>
+          <a:effectLst/>
+        </p:spPr>
+        <p:style>
+          <a:lnRef idx="1">
+            <a:schemeClr val="accent1"/>
+          </a:lnRef>
+          <a:fillRef idx="3">
+            <a:schemeClr val="accent1"/>
+          </a:fillRef>
+          <a:effectRef idx="2">
+            <a:schemeClr val="accent1"/>
+          </a:effectRef>
+          <a:fontRef idx="minor">
+            <a:schemeClr val="lt1"/>
+          </a:fontRef>
+        </p:style>
+        <p:txBody>
+          <a:bodyPr rtlCol="0" anchor="ctr" wrap="square" lIns="73152" rIns="73152" tIns="36576" bIns="36576"/>
+          <a:lstStyle/>
+          <a:p>
+            <a:pPr algn="ctr"/>
+            <a:r>
+              <a:rPr sz="1200" b="1">
+                <a:solidFill>
+                  <a:srgbClr val="202020"/>
+                </a:solidFill>
+              </a:rPr>
+              <a:t>frontend</a:t>
+            </a:r>
+          </a:p>
+          <a:p>
+            <a:pPr algn="ctr"/>
+            <a:r>
+              <a:rPr sz="1200" b="1">
+                <a:solidFill>
+                  <a:srgbClr val="202020"/>
+                </a:solidFill>
+              </a:rPr>
+              <a:t>LWC · Aura</a:t>
             </a:r>
           </a:p>
         </p:txBody>
       </p:sp>
       <p:cxnSp>
         <p:nvCxnSpPr>
-          <p:cNvPr id="18" name="Connector 17"/>
+          <p:cNvPr id="30" name="Connector 29"/>
           <p:cNvCxnSpPr/>
           <p:nvPr/>
         </p:nvCxnSpPr>
         <p:spPr>
           <a:xfrm>
-            <a:off x="3931920" y="4709159"/>
-            <a:ext cx="0" cy="228601"/>
+            <a:off x="5932170" y="5052059"/>
+            <a:ext cx="811529" cy="0"/>
           </a:xfrm>
           <a:prstGeom prst="line">
             <a:avLst/>
           </a:prstGeom>
-          <a:ln w="22225">
+          <a:ln w="19050">
             <a:solidFill>
               <a:srgbClr val="1F4E78"/>
             </a:solidFill>
@@ -4034,19 +4724,361 @@
       </p:cxnSp>
       <p:cxnSp>
         <p:nvCxnSpPr>
-          <p:cNvPr id="19" name="Connector 18"/>
+          <p:cNvPr id="31" name="Connector 30"/>
           <p:cNvCxnSpPr/>
           <p:nvPr/>
         </p:nvCxnSpPr>
         <p:spPr>
           <a:xfrm>
-            <a:off x="10698480" y="4709159"/>
-            <a:ext cx="0" cy="228601"/>
+            <a:off x="9761220" y="5052059"/>
+            <a:ext cx="811529" cy="0"/>
           </a:xfrm>
           <a:prstGeom prst="line">
             <a:avLst/>
           </a:prstGeom>
-          <a:ln w="22225">
+          <a:ln w="19050">
+            <a:solidFill>
+              <a:srgbClr val="1F4E78"/>
+            </a:solidFill>
+            <a:tailEnd type="triangle" w="med" h="med"/>
+          </a:ln>
+        </p:spPr>
+        <p:style>
+          <a:lnRef idx="2">
+            <a:schemeClr val="accent1"/>
+          </a:lnRef>
+          <a:fillRef idx="0">
+            <a:schemeClr val="accent1"/>
+          </a:fillRef>
+          <a:effectRef idx="1">
+            <a:schemeClr val="accent1"/>
+          </a:effectRef>
+          <a:fontRef idx="minor">
+            <a:schemeClr val="tx1"/>
+          </a:fontRef>
+        </p:style>
+      </p:cxnSp>
+      <p:sp>
+        <p:nvSpPr>
+          <p:cNvPr id="32" name="Rectangle 31"/>
+          <p:cNvSpPr/>
+          <p:nvPr/>
+        </p:nvSpPr>
+        <p:spPr>
+          <a:xfrm>
+            <a:off x="182880" y="5623560"/>
+            <a:ext cx="14264640" cy="1051560"/>
+          </a:xfrm>
+          <a:prstGeom prst="rect">
+            <a:avLst/>
+          </a:prstGeom>
+          <a:solidFill>
+            <a:srgbClr val="F7F7F7"/>
+          </a:solidFill>
+          <a:ln w="6350">
+            <a:solidFill>
+              <a:srgbClr val="CCCCCC"/>
+            </a:solidFill>
+          </a:ln>
+          <a:effectLst/>
+        </p:spPr>
+        <p:style>
+          <a:lnRef idx="1">
+            <a:schemeClr val="accent1"/>
+          </a:lnRef>
+          <a:fillRef idx="3">
+            <a:schemeClr val="accent1"/>
+          </a:fillRef>
+          <a:effectRef idx="2">
+            <a:schemeClr val="accent1"/>
+          </a:effectRef>
+          <a:fontRef idx="minor">
+            <a:schemeClr val="lt1"/>
+          </a:fontRef>
+        </p:style>
+        <p:txBody>
+          <a:bodyPr rtlCol="0" anchor="ctr"/>
+          <a:lstStyle/>
+          <a:p>
+            <a:pPr algn="ctr"/>
+          </a:p>
+        </p:txBody>
+      </p:sp>
+      <p:sp>
+        <p:nvSpPr>
+          <p:cNvPr id="33" name="Rectangle 32"/>
+          <p:cNvSpPr/>
+          <p:nvPr/>
+        </p:nvSpPr>
+        <p:spPr>
+          <a:xfrm>
+            <a:off x="274320" y="5737860"/>
+            <a:ext cx="1737360" cy="822960"/>
+          </a:xfrm>
+          <a:prstGeom prst="rect">
+            <a:avLst/>
+          </a:prstGeom>
+          <a:solidFill>
+            <a:srgbClr val="F4CCCC"/>
+          </a:solidFill>
+          <a:ln w="12700">
+            <a:solidFill>
+              <a:srgbClr val="1F4E78"/>
+            </a:solidFill>
+          </a:ln>
+          <a:effectLst/>
+        </p:spPr>
+        <p:style>
+          <a:lnRef idx="1">
+            <a:schemeClr val="accent1"/>
+          </a:lnRef>
+          <a:fillRef idx="3">
+            <a:schemeClr val="accent1"/>
+          </a:fillRef>
+          <a:effectRef idx="2">
+            <a:schemeClr val="accent1"/>
+          </a:effectRef>
+          <a:fontRef idx="minor">
+            <a:schemeClr val="lt1"/>
+          </a:fontRef>
+        </p:style>
+        <p:txBody>
+          <a:bodyPr rtlCol="0" anchor="ctr" wrap="square" lIns="73152" rIns="73152" tIns="36576" bIns="36576"/>
+          <a:lstStyle/>
+          <a:p>
+            <a:pPr algn="ctr"/>
+            <a:r>
+              <a:rPr sz="1300" b="1">
+                <a:solidFill>
+                  <a:srgbClr val="202020"/>
+                </a:solidFill>
+              </a:rPr>
+              <a:t>5. Validate</a:t>
+            </a:r>
+          </a:p>
+          <a:p>
+            <a:pPr algn="ctr"/>
+            <a:r>
+              <a:rPr sz="1300" b="1">
+                <a:solidFill>
+                  <a:srgbClr val="202020"/>
+                </a:solidFill>
+              </a:rPr>
+              <a:t>(scratch org)</a:t>
+            </a:r>
+          </a:p>
+        </p:txBody>
+      </p:sp>
+      <p:sp>
+        <p:nvSpPr>
+          <p:cNvPr id="34" name="Rounded Rectangle 33"/>
+          <p:cNvSpPr/>
+          <p:nvPr/>
+        </p:nvSpPr>
+        <p:spPr>
+          <a:xfrm>
+            <a:off x="2960369" y="5760720"/>
+            <a:ext cx="2926080" cy="777240"/>
+          </a:xfrm>
+          <a:prstGeom prst="roundRect">
+            <a:avLst/>
+          </a:prstGeom>
+          <a:solidFill>
+            <a:srgbClr val="F4CCCC"/>
+          </a:solidFill>
+          <a:ln w="12700">
+            <a:solidFill>
+              <a:srgbClr val="1F4E78"/>
+            </a:solidFill>
+          </a:ln>
+          <a:effectLst/>
+        </p:spPr>
+        <p:style>
+          <a:lnRef idx="1">
+            <a:schemeClr val="accent1"/>
+          </a:lnRef>
+          <a:fillRef idx="3">
+            <a:schemeClr val="accent1"/>
+          </a:fillRef>
+          <a:effectRef idx="2">
+            <a:schemeClr val="accent1"/>
+          </a:effectRef>
+          <a:fontRef idx="minor">
+            <a:schemeClr val="lt1"/>
+          </a:fontRef>
+        </p:style>
+        <p:txBody>
+          <a:bodyPr rtlCol="0" anchor="ctr" wrap="square" lIns="73152" rIns="73152" tIns="36576" bIns="36576"/>
+          <a:lstStyle/>
+          <a:p>
+            <a:pPr algn="ctr"/>
+            <a:r>
+              <a:rPr sz="1200" b="1">
+                <a:solidFill>
+                  <a:srgbClr val="202020"/>
+                </a:solidFill>
+              </a:rPr>
+              <a:t>Deploy to</a:t>
+            </a:r>
+          </a:p>
+          <a:p>
+            <a:pPr algn="ctr"/>
+            <a:r>
+              <a:rPr sz="1200" b="1">
+                <a:solidFill>
+                  <a:srgbClr val="202020"/>
+                </a:solidFill>
+              </a:rPr>
+              <a:t>per-branch scratch</a:t>
+            </a:r>
+          </a:p>
+        </p:txBody>
+      </p:sp>
+      <p:sp>
+        <p:nvSpPr>
+          <p:cNvPr id="35" name="Rounded Rectangle 34"/>
+          <p:cNvSpPr/>
+          <p:nvPr/>
+        </p:nvSpPr>
+        <p:spPr>
+          <a:xfrm>
+            <a:off x="6789419" y="5760720"/>
+            <a:ext cx="2926080" cy="777240"/>
+          </a:xfrm>
+          <a:prstGeom prst="roundRect">
+            <a:avLst/>
+          </a:prstGeom>
+          <a:solidFill>
+            <a:srgbClr val="F4CCCC"/>
+          </a:solidFill>
+          <a:ln w="12700">
+            <a:solidFill>
+              <a:srgbClr val="1F4E78"/>
+            </a:solidFill>
+          </a:ln>
+          <a:effectLst/>
+        </p:spPr>
+        <p:style>
+          <a:lnRef idx="1">
+            <a:schemeClr val="accent1"/>
+          </a:lnRef>
+          <a:fillRef idx="3">
+            <a:schemeClr val="accent1"/>
+          </a:fillRef>
+          <a:effectRef idx="2">
+            <a:schemeClr val="accent1"/>
+          </a:effectRef>
+          <a:fontRef idx="minor">
+            <a:schemeClr val="lt1"/>
+          </a:fontRef>
+        </p:style>
+        <p:txBody>
+          <a:bodyPr rtlCol="0" anchor="ctr" wrap="square" lIns="73152" rIns="73152" tIns="36576" bIns="36576"/>
+          <a:lstStyle/>
+          <a:p>
+            <a:pPr algn="ctr"/>
+            <a:r>
+              <a:rPr sz="1200" b="1">
+                <a:solidFill>
+                  <a:srgbClr val="202020"/>
+                </a:solidFill>
+              </a:rPr>
+              <a:t>Apex tests</a:t>
+            </a:r>
+          </a:p>
+          <a:p>
+            <a:pPr algn="ctr"/>
+            <a:r>
+              <a:rPr sz="1200" b="1">
+                <a:solidFill>
+                  <a:srgbClr val="202020"/>
+                </a:solidFill>
+              </a:rPr>
+              <a:t>coverage ≥ 75%</a:t>
+            </a:r>
+          </a:p>
+        </p:txBody>
+      </p:sp>
+      <p:sp>
+        <p:nvSpPr>
+          <p:cNvPr id="36" name="Rounded Rectangle 35"/>
+          <p:cNvSpPr/>
+          <p:nvPr/>
+        </p:nvSpPr>
+        <p:spPr>
+          <a:xfrm>
+            <a:off x="10618469" y="5760720"/>
+            <a:ext cx="2926080" cy="777240"/>
+          </a:xfrm>
+          <a:prstGeom prst="roundRect">
+            <a:avLst/>
+          </a:prstGeom>
+          <a:solidFill>
+            <a:srgbClr val="F4CCCC"/>
+          </a:solidFill>
+          <a:ln w="12700">
+            <a:solidFill>
+              <a:srgbClr val="1F4E78"/>
+            </a:solidFill>
+          </a:ln>
+          <a:effectLst/>
+        </p:spPr>
+        <p:style>
+          <a:lnRef idx="1">
+            <a:schemeClr val="accent1"/>
+          </a:lnRef>
+          <a:fillRef idx="3">
+            <a:schemeClr val="accent1"/>
+          </a:fillRef>
+          <a:effectRef idx="2">
+            <a:schemeClr val="accent1"/>
+          </a:effectRef>
+          <a:fontRef idx="minor">
+            <a:schemeClr val="lt1"/>
+          </a:fontRef>
+        </p:style>
+        <p:txBody>
+          <a:bodyPr rtlCol="0" anchor="ctr" wrap="square" lIns="73152" rIns="73152" tIns="36576" bIns="36576"/>
+          <a:lstStyle/>
+          <a:p>
+            <a:pPr algn="ctr"/>
+            <a:r>
+              <a:rPr sz="1200" b="1">
+                <a:solidFill>
+                  <a:srgbClr val="202020"/>
+                </a:solidFill>
+              </a:rPr>
+              <a:t>LWC Jest +</a:t>
+            </a:r>
+          </a:p>
+          <a:p>
+            <a:pPr algn="ctr"/>
+            <a:r>
+              <a:rPr sz="1200" b="1">
+                <a:solidFill>
+                  <a:srgbClr val="202020"/>
+                </a:solidFill>
+              </a:rPr>
+              <a:t>Code Analyzer</a:t>
+            </a:r>
+          </a:p>
+        </p:txBody>
+      </p:sp>
+      <p:cxnSp>
+        <p:nvCxnSpPr>
+          <p:cNvPr id="37" name="Connector 36"/>
+          <p:cNvCxnSpPr/>
+          <p:nvPr/>
+        </p:nvCxnSpPr>
+        <p:spPr>
+          <a:xfrm>
+            <a:off x="5932170" y="6149340"/>
+            <a:ext cx="811529" cy="0"/>
+          </a:xfrm>
+          <a:prstGeom prst="line">
+            <a:avLst/>
+          </a:prstGeom>
+          <a:ln w="19050">
             <a:solidFill>
               <a:srgbClr val="1F4E78"/>
             </a:solidFill>
@@ -4070,19 +5102,19 @@
       </p:cxnSp>
       <p:cxnSp>
         <p:nvCxnSpPr>
-          <p:cNvPr id="20" name="Connector 19"/>
+          <p:cNvPr id="38" name="Connector 37"/>
           <p:cNvCxnSpPr/>
           <p:nvPr/>
         </p:nvCxnSpPr>
         <p:spPr>
-          <a:xfrm flipV="1">
-            <a:off x="5120640" y="4320540"/>
-            <a:ext cx="4389120" cy="1005840"/>
-          </a:xfrm>
-          <a:prstGeom prst="bentConnector3">
-            <a:avLst/>
-          </a:prstGeom>
-          <a:ln w="22225">
+          <a:xfrm>
+            <a:off x="9761220" y="6149340"/>
+            <a:ext cx="811529" cy="0"/>
+          </a:xfrm>
+          <a:prstGeom prst="line">
+            <a:avLst/>
+          </a:prstGeom>
+          <a:ln w="19050">
             <a:solidFill>
               <a:srgbClr val="1F4E78"/>
             </a:solidFill>
@@ -4106,53 +5138,314 @@
       </p:cxnSp>
       <p:sp>
         <p:nvSpPr>
-          <p:cNvPr id="21" name="TextBox 20"/>
-          <p:cNvSpPr txBox="1"/>
-          <p:nvPr/>
-        </p:nvSpPr>
-        <p:spPr>
-          <a:xfrm>
-            <a:off x="5029200" y="4526280"/>
-            <a:ext cx="3200400" cy="274320"/>
+          <p:cNvPr id="39" name="Rectangle 38"/>
+          <p:cNvSpPr/>
+          <p:nvPr/>
+        </p:nvSpPr>
+        <p:spPr>
+          <a:xfrm>
+            <a:off x="182880" y="6720840"/>
+            <a:ext cx="14264640" cy="1051560"/>
           </a:xfrm>
           <a:prstGeom prst="rect">
             <a:avLst/>
           </a:prstGeom>
-          <a:noFill/>
-        </p:spPr>
-        <p:txBody>
-          <a:bodyPr wrap="none" lIns="18288" rIns="18288" tIns="0" bIns="0">
-            <a:spAutoFit/>
-          </a:bodyPr>
-          <a:lstStyle/>
-          <a:p>
-            <a:pPr algn="ctr"/>
-            <a:r>
-              <a:rPr sz="1000" b="1">
-                <a:solidFill>
-                  <a:srgbClr val="1F4E78"/>
-                </a:solidFill>
-              </a:rPr>
-              <a:t>replies feed techlead</a:t>
+          <a:solidFill>
+            <a:srgbClr val="F7F7F7"/>
+          </a:solidFill>
+          <a:ln w="6350">
+            <a:solidFill>
+              <a:srgbClr val="CCCCCC"/>
+            </a:solidFill>
+          </a:ln>
+          <a:effectLst/>
+        </p:spPr>
+        <p:style>
+          <a:lnRef idx="1">
+            <a:schemeClr val="accent1"/>
+          </a:lnRef>
+          <a:fillRef idx="3">
+            <a:schemeClr val="accent1"/>
+          </a:fillRef>
+          <a:effectRef idx="2">
+            <a:schemeClr val="accent1"/>
+          </a:effectRef>
+          <a:fontRef idx="minor">
+            <a:schemeClr val="lt1"/>
+          </a:fontRef>
+        </p:style>
+        <p:txBody>
+          <a:bodyPr rtlCol="0" anchor="ctr"/>
+          <a:lstStyle/>
+          <a:p>
+            <a:pPr algn="ctr"/>
+          </a:p>
+        </p:txBody>
+      </p:sp>
+      <p:sp>
+        <p:nvSpPr>
+          <p:cNvPr id="40" name="Rectangle 39"/>
+          <p:cNvSpPr/>
+          <p:nvPr/>
+        </p:nvSpPr>
+        <p:spPr>
+          <a:xfrm>
+            <a:off x="274320" y="6835140"/>
+            <a:ext cx="1737360" cy="822960"/>
+          </a:xfrm>
+          <a:prstGeom prst="rect">
+            <a:avLst/>
+          </a:prstGeom>
+          <a:solidFill>
+            <a:srgbClr val="E2EFDA"/>
+          </a:solidFill>
+          <a:ln w="12700">
+            <a:solidFill>
+              <a:srgbClr val="1F4E78"/>
+            </a:solidFill>
+          </a:ln>
+          <a:effectLst/>
+        </p:spPr>
+        <p:style>
+          <a:lnRef idx="1">
+            <a:schemeClr val="accent1"/>
+          </a:lnRef>
+          <a:fillRef idx="3">
+            <a:schemeClr val="accent1"/>
+          </a:fillRef>
+          <a:effectRef idx="2">
+            <a:schemeClr val="accent1"/>
+          </a:effectRef>
+          <a:fontRef idx="minor">
+            <a:schemeClr val="lt1"/>
+          </a:fontRef>
+        </p:style>
+        <p:txBody>
+          <a:bodyPr rtlCol="0" anchor="ctr" wrap="square" lIns="73152" rIns="73152" tIns="36576" bIns="36576"/>
+          <a:lstStyle/>
+          <a:p>
+            <a:pPr algn="ctr"/>
+            <a:r>
+              <a:rPr sz="1300" b="1">
+                <a:solidFill>
+                  <a:srgbClr val="202020"/>
+                </a:solidFill>
+              </a:rPr>
+              <a:t>6. Ship &amp; QA</a:t>
+            </a:r>
+          </a:p>
+        </p:txBody>
+      </p:sp>
+      <p:sp>
+        <p:nvSpPr>
+          <p:cNvPr id="41" name="Rounded Rectangle 40"/>
+          <p:cNvSpPr/>
+          <p:nvPr/>
+        </p:nvSpPr>
+        <p:spPr>
+          <a:xfrm>
+            <a:off x="2960369" y="6858000"/>
+            <a:ext cx="2926080" cy="777240"/>
+          </a:xfrm>
+          <a:prstGeom prst="roundRect">
+            <a:avLst/>
+          </a:prstGeom>
+          <a:solidFill>
+            <a:srgbClr val="DEEBF7"/>
+          </a:solidFill>
+          <a:ln w="12700">
+            <a:solidFill>
+              <a:srgbClr val="1F4E78"/>
+            </a:solidFill>
+          </a:ln>
+          <a:effectLst/>
+        </p:spPr>
+        <p:style>
+          <a:lnRef idx="1">
+            <a:schemeClr val="accent1"/>
+          </a:lnRef>
+          <a:fillRef idx="3">
+            <a:schemeClr val="accent1"/>
+          </a:fillRef>
+          <a:effectRef idx="2">
+            <a:schemeClr val="accent1"/>
+          </a:effectRef>
+          <a:fontRef idx="minor">
+            <a:schemeClr val="lt1"/>
+          </a:fontRef>
+        </p:style>
+        <p:txBody>
+          <a:bodyPr rtlCol="0" anchor="ctr" wrap="square" lIns="73152" rIns="73152" tIns="36576" bIns="36576"/>
+          <a:lstStyle/>
+          <a:p>
+            <a:pPr algn="ctr"/>
+            <a:r>
+              <a:rPr sz="1200" b="1">
+                <a:solidFill>
+                  <a:srgbClr val="202020"/>
+                </a:solidFill>
+              </a:rPr>
+              <a:t>Commit · Push</a:t>
+            </a:r>
+          </a:p>
+          <a:p>
+            <a:pPr algn="ctr"/>
+            <a:r>
+              <a:rPr sz="1200" b="1">
+                <a:solidFill>
+                  <a:srgbClr val="202020"/>
+                </a:solidFill>
+              </a:rPr>
+              <a:t>Open PR (gh)</a:t>
+            </a:r>
+          </a:p>
+        </p:txBody>
+      </p:sp>
+      <p:sp>
+        <p:nvSpPr>
+          <p:cNvPr id="42" name="Rounded Rectangle 41"/>
+          <p:cNvSpPr/>
+          <p:nvPr/>
+        </p:nvSpPr>
+        <p:spPr>
+          <a:xfrm>
+            <a:off x="6789419" y="6858000"/>
+            <a:ext cx="2926080" cy="777240"/>
+          </a:xfrm>
+          <a:prstGeom prst="roundRect">
+            <a:avLst/>
+          </a:prstGeom>
+          <a:solidFill>
+            <a:srgbClr val="F4CCCC"/>
+          </a:solidFill>
+          <a:ln w="12700">
+            <a:solidFill>
+              <a:srgbClr val="1F4E78"/>
+            </a:solidFill>
+          </a:ln>
+          <a:effectLst/>
+        </p:spPr>
+        <p:style>
+          <a:lnRef idx="1">
+            <a:schemeClr val="accent1"/>
+          </a:lnRef>
+          <a:fillRef idx="3">
+            <a:schemeClr val="accent1"/>
+          </a:fillRef>
+          <a:effectRef idx="2">
+            <a:schemeClr val="accent1"/>
+          </a:effectRef>
+          <a:fontRef idx="minor">
+            <a:schemeClr val="lt1"/>
+          </a:fontRef>
+        </p:style>
+        <p:txBody>
+          <a:bodyPr rtlCol="0" anchor="ctr" wrap="square" lIns="73152" rIns="73152" tIns="36576" bIns="36576"/>
+          <a:lstStyle/>
+          <a:p>
+            <a:pPr algn="ctr"/>
+            <a:r>
+              <a:rPr sz="1200" b="1">
+                <a:solidFill>
+                  <a:srgbClr val="202020"/>
+                </a:solidFill>
+              </a:rPr>
+              <a:t>tester agent</a:t>
+            </a:r>
+          </a:p>
+          <a:p>
+            <a:pPr algn="ctr"/>
+            <a:r>
+              <a:rPr sz="1200" b="1">
+                <a:solidFill>
+                  <a:srgbClr val="202020"/>
+                </a:solidFill>
+              </a:rPr>
+              <a:t>SHA-pinned report</a:t>
+            </a:r>
+          </a:p>
+        </p:txBody>
+      </p:sp>
+      <p:sp>
+        <p:nvSpPr>
+          <p:cNvPr id="43" name="Rounded Rectangle 42"/>
+          <p:cNvSpPr/>
+          <p:nvPr/>
+        </p:nvSpPr>
+        <p:spPr>
+          <a:xfrm>
+            <a:off x="10618469" y="6858000"/>
+            <a:ext cx="2926080" cy="777240"/>
+          </a:xfrm>
+          <a:prstGeom prst="roundRect">
+            <a:avLst/>
+          </a:prstGeom>
+          <a:solidFill>
+            <a:srgbClr val="E2EFDA"/>
+          </a:solidFill>
+          <a:ln w="12700">
+            <a:solidFill>
+              <a:srgbClr val="1F4E78"/>
+            </a:solidFill>
+          </a:ln>
+          <a:effectLst/>
+        </p:spPr>
+        <p:style>
+          <a:lnRef idx="1">
+            <a:schemeClr val="accent1"/>
+          </a:lnRef>
+          <a:fillRef idx="3">
+            <a:schemeClr val="accent1"/>
+          </a:fillRef>
+          <a:effectRef idx="2">
+            <a:schemeClr val="accent1"/>
+          </a:effectRef>
+          <a:fontRef idx="minor">
+            <a:schemeClr val="lt1"/>
+          </a:fontRef>
+        </p:style>
+        <p:txBody>
+          <a:bodyPr rtlCol="0" anchor="ctr" wrap="square" lIns="73152" rIns="73152" tIns="36576" bIns="36576"/>
+          <a:lstStyle/>
+          <a:p>
+            <a:pPr algn="ctr"/>
+            <a:r>
+              <a:rPr sz="1200" b="1">
+                <a:solidFill>
+                  <a:srgbClr val="202020"/>
+                </a:solidFill>
+              </a:rPr>
+              <a:t>dev-fixer (≤3×)</a:t>
+            </a:r>
+          </a:p>
+          <a:p>
+            <a:pPr algn="ctr"/>
+            <a:r>
+              <a:rPr sz="1200" b="1">
+                <a:solidFill>
+                  <a:srgbClr val="202020"/>
+                </a:solidFill>
+              </a:rPr>
+              <a:t>→ ai-implemented</a:t>
             </a:r>
           </a:p>
         </p:txBody>
       </p:sp>
       <p:cxnSp>
         <p:nvCxnSpPr>
-          <p:cNvPr id="22" name="Connector 21"/>
+          <p:cNvPr id="44" name="Connector 43"/>
           <p:cNvCxnSpPr/>
           <p:nvPr/>
         </p:nvCxnSpPr>
         <p:spPr>
-          <a:xfrm flipH="1">
-            <a:off x="7315200" y="5715000"/>
-            <a:ext cx="3383280" cy="228600"/>
+          <a:xfrm>
+            <a:off x="5932170" y="7246620"/>
+            <a:ext cx="811529" cy="0"/>
           </a:xfrm>
           <a:prstGeom prst="line">
             <a:avLst/>
           </a:prstGeom>
-          <a:ln w="22225">
+          <a:ln w="19050">
             <a:solidFill>
               <a:srgbClr val="1F4E78"/>
             </a:solidFill>
@@ -4176,19 +5469,19 @@
       </p:cxnSp>
       <p:cxnSp>
         <p:nvCxnSpPr>
-          <p:cNvPr id="23" name="Connector 22"/>
+          <p:cNvPr id="45" name="Connector 44"/>
           <p:cNvCxnSpPr/>
           <p:nvPr/>
         </p:nvCxnSpPr>
         <p:spPr>
           <a:xfrm>
-            <a:off x="7315200" y="6720840"/>
-            <a:ext cx="0" cy="137160"/>
+            <a:off x="9761220" y="7246620"/>
+            <a:ext cx="811529" cy="0"/>
           </a:xfrm>
           <a:prstGeom prst="line">
             <a:avLst/>
           </a:prstGeom>
-          <a:ln w="22225">
+          <a:ln w="19050">
             <a:solidFill>
               <a:srgbClr val="1F4E78"/>
             </a:solidFill>
@@ -4212,960 +5505,14 @@
       </p:cxnSp>
       <p:sp>
         <p:nvSpPr>
-          <p:cNvPr id="24" name="Rounded Rectangle 23"/>
+          <p:cNvPr id="46" name="Rectangle 45"/>
           <p:cNvSpPr/>
           <p:nvPr/>
         </p:nvSpPr>
         <p:spPr>
           <a:xfrm>
-            <a:off x="1371600" y="7452360"/>
-            <a:ext cx="2103120" cy="640080"/>
-          </a:xfrm>
-          <a:prstGeom prst="roundRect">
-            <a:avLst/>
-          </a:prstGeom>
-          <a:solidFill>
-            <a:srgbClr val="FFF2CC"/>
-          </a:solidFill>
-          <a:ln w="15875">
-            <a:solidFill>
-              <a:srgbClr val="1F4E78"/>
-            </a:solidFill>
-          </a:ln>
-          <a:effectLst/>
-        </p:spPr>
-        <p:style>
-          <a:lnRef idx="1">
-            <a:schemeClr val="accent1"/>
-          </a:lnRef>
-          <a:fillRef idx="3">
-            <a:schemeClr val="accent1"/>
-          </a:fillRef>
-          <a:effectRef idx="2">
-            <a:schemeClr val="accent1"/>
-          </a:effectRef>
-          <a:fontRef idx="minor">
-            <a:schemeClr val="lt1"/>
-          </a:fontRef>
-        </p:style>
-        <p:txBody>
-          <a:bodyPr rtlCol="0" anchor="ctr" wrap="square" lIns="73152" rIns="73152" tIns="36576" bIns="36576"/>
-          <a:lstStyle/>
-          <a:p>
-            <a:pPr algn="ctr"/>
-            <a:r>
-              <a:rPr sz="1100" b="1">
-                <a:solidFill>
-                  <a:srgbClr val="202020"/>
-                </a:solidFill>
-              </a:rPr>
-              <a:t>contract</a:t>
-            </a:r>
-          </a:p>
-          <a:p>
-            <a:pPr algn="ctr"/>
-            <a:r>
-              <a:rPr sz="1100" b="1">
-                <a:solidFill>
-                  <a:srgbClr val="202020"/>
-                </a:solidFill>
-              </a:rPr>
-              <a:t>(metadata + APIs)</a:t>
-            </a:r>
-          </a:p>
-        </p:txBody>
-      </p:sp>
-      <p:sp>
-        <p:nvSpPr>
-          <p:cNvPr id="25" name="Rounded Rectangle 24"/>
-          <p:cNvSpPr/>
-          <p:nvPr/>
-        </p:nvSpPr>
-        <p:spPr>
-          <a:xfrm>
-            <a:off x="3840480" y="7452360"/>
-            <a:ext cx="2103120" cy="640080"/>
-          </a:xfrm>
-          <a:prstGeom prst="roundRect">
-            <a:avLst/>
-          </a:prstGeom>
-          <a:solidFill>
-            <a:srgbClr val="FFF2CC"/>
-          </a:solidFill>
-          <a:ln w="15875">
-            <a:solidFill>
-              <a:srgbClr val="1F4E78"/>
-            </a:solidFill>
-          </a:ln>
-          <a:effectLst/>
-        </p:spPr>
-        <p:style>
-          <a:lnRef idx="1">
-            <a:schemeClr val="accent1"/>
-          </a:lnRef>
-          <a:fillRef idx="3">
-            <a:schemeClr val="accent1"/>
-          </a:fillRef>
-          <a:effectRef idx="2">
-            <a:schemeClr val="accent1"/>
-          </a:effectRef>
-          <a:fontRef idx="minor">
-            <a:schemeClr val="lt1"/>
-          </a:fontRef>
-        </p:style>
-        <p:txBody>
-          <a:bodyPr rtlCol="0" anchor="ctr" wrap="square" lIns="73152" rIns="73152" tIns="36576" bIns="36576"/>
-          <a:lstStyle/>
-          <a:p>
-            <a:pPr algn="ctr"/>
-            <a:r>
-              <a:rPr sz="1100" b="1">
-                <a:solidFill>
-                  <a:srgbClr val="202020"/>
-                </a:solidFill>
-              </a:rPr>
-              <a:t>backend</a:t>
-            </a:r>
-          </a:p>
-          <a:p>
-            <a:pPr algn="ctr"/>
-            <a:r>
-              <a:rPr sz="1100" b="1">
-                <a:solidFill>
-                  <a:srgbClr val="202020"/>
-                </a:solidFill>
-              </a:rPr>
-              <a:t>(Apex / Flows)</a:t>
-            </a:r>
-          </a:p>
-        </p:txBody>
-      </p:sp>
-      <p:sp>
-        <p:nvSpPr>
-          <p:cNvPr id="26" name="Rounded Rectangle 25"/>
-          <p:cNvSpPr/>
-          <p:nvPr/>
-        </p:nvSpPr>
-        <p:spPr>
-          <a:xfrm>
-            <a:off x="6309360" y="7452360"/>
-            <a:ext cx="2103120" cy="640080"/>
-          </a:xfrm>
-          <a:prstGeom prst="roundRect">
-            <a:avLst/>
-          </a:prstGeom>
-          <a:solidFill>
-            <a:srgbClr val="FFF2CC"/>
-          </a:solidFill>
-          <a:ln w="15875">
-            <a:solidFill>
-              <a:srgbClr val="1F4E78"/>
-            </a:solidFill>
-          </a:ln>
-          <a:effectLst/>
-        </p:spPr>
-        <p:style>
-          <a:lnRef idx="1">
-            <a:schemeClr val="accent1"/>
-          </a:lnRef>
-          <a:fillRef idx="3">
-            <a:schemeClr val="accent1"/>
-          </a:fillRef>
-          <a:effectRef idx="2">
-            <a:schemeClr val="accent1"/>
-          </a:effectRef>
-          <a:fontRef idx="minor">
-            <a:schemeClr val="lt1"/>
-          </a:fontRef>
-        </p:style>
-        <p:txBody>
-          <a:bodyPr rtlCol="0" anchor="ctr" wrap="square" lIns="73152" rIns="73152" tIns="36576" bIns="36576"/>
-          <a:lstStyle/>
-          <a:p>
-            <a:pPr algn="ctr"/>
-            <a:r>
-              <a:rPr sz="1100" b="1">
-                <a:solidFill>
-                  <a:srgbClr val="202020"/>
-                </a:solidFill>
-              </a:rPr>
-              <a:t>frontend</a:t>
-            </a:r>
-          </a:p>
-          <a:p>
-            <a:pPr algn="ctr"/>
-            <a:r>
-              <a:rPr sz="1100" b="1">
-                <a:solidFill>
-                  <a:srgbClr val="202020"/>
-                </a:solidFill>
-              </a:rPr>
-              <a:t>(LWC / Aura)</a:t>
-            </a:r>
-          </a:p>
-        </p:txBody>
-      </p:sp>
-      <p:cxnSp>
-        <p:nvCxnSpPr>
-          <p:cNvPr id="27" name="Connector 26"/>
-          <p:cNvCxnSpPr/>
-          <p:nvPr/>
-        </p:nvCxnSpPr>
-        <p:spPr>
-          <a:xfrm>
-            <a:off x="3474720" y="7772400"/>
-            <a:ext cx="365760" cy="0"/>
-          </a:xfrm>
-          <a:prstGeom prst="line">
-            <a:avLst/>
-          </a:prstGeom>
-          <a:ln w="22225">
-            <a:solidFill>
-              <a:srgbClr val="1F4E78"/>
-            </a:solidFill>
-            <a:tailEnd type="triangle" w="med" h="med"/>
-          </a:ln>
-        </p:spPr>
-        <p:style>
-          <a:lnRef idx="2">
-            <a:schemeClr val="accent1"/>
-          </a:lnRef>
-          <a:fillRef idx="0">
-            <a:schemeClr val="accent1"/>
-          </a:fillRef>
-          <a:effectRef idx="1">
-            <a:schemeClr val="accent1"/>
-          </a:effectRef>
-          <a:fontRef idx="minor">
-            <a:schemeClr val="tx1"/>
-          </a:fontRef>
-        </p:style>
-      </p:cxnSp>
-      <p:cxnSp>
-        <p:nvCxnSpPr>
-          <p:cNvPr id="28" name="Connector 27"/>
-          <p:cNvCxnSpPr/>
-          <p:nvPr/>
-        </p:nvCxnSpPr>
-        <p:spPr>
-          <a:xfrm>
-            <a:off x="5943600" y="7772400"/>
-            <a:ext cx="365760" cy="0"/>
-          </a:xfrm>
-          <a:prstGeom prst="line">
-            <a:avLst/>
-          </a:prstGeom>
-          <a:ln w="22225">
-            <a:solidFill>
-              <a:srgbClr val="1F4E78"/>
-            </a:solidFill>
-            <a:tailEnd type="triangle" w="med" h="med"/>
-          </a:ln>
-        </p:spPr>
-        <p:style>
-          <a:lnRef idx="2">
-            <a:schemeClr val="accent1"/>
-          </a:lnRef>
-          <a:fillRef idx="0">
-            <a:schemeClr val="accent1"/>
-          </a:fillRef>
-          <a:effectRef idx="1">
-            <a:schemeClr val="accent1"/>
-          </a:effectRef>
-          <a:fontRef idx="minor">
-            <a:schemeClr val="tx1"/>
-          </a:fontRef>
-        </p:style>
-      </p:cxnSp>
-      <p:cxnSp>
-        <p:nvCxnSpPr>
-          <p:cNvPr id="29" name="Connector 28"/>
-          <p:cNvCxnSpPr/>
-          <p:nvPr/>
-        </p:nvCxnSpPr>
-        <p:spPr>
-          <a:xfrm flipH="1" flipV="1">
-            <a:off x="2423160" y="7452360"/>
-            <a:ext cx="4892040" cy="182880"/>
-          </a:xfrm>
-          <a:prstGeom prst="bentConnector3">
-            <a:avLst/>
-          </a:prstGeom>
-          <a:ln w="22225">
-            <a:solidFill>
-              <a:srgbClr val="1F4E78"/>
-            </a:solidFill>
-            <a:tailEnd type="triangle" w="med" h="med"/>
-          </a:ln>
-        </p:spPr>
-        <p:style>
-          <a:lnRef idx="2">
-            <a:schemeClr val="accent1"/>
-          </a:lnRef>
-          <a:fillRef idx="0">
-            <a:schemeClr val="accent1"/>
-          </a:fillRef>
-          <a:effectRef idx="1">
-            <a:schemeClr val="accent1"/>
-          </a:effectRef>
-          <a:fontRef idx="minor">
-            <a:schemeClr val="tx1"/>
-          </a:fontRef>
-        </p:style>
-      </p:cxnSp>
-      <p:sp>
-        <p:nvSpPr>
-          <p:cNvPr id="30" name="Rounded Rectangle 29"/>
-          <p:cNvSpPr/>
-          <p:nvPr/>
-        </p:nvSpPr>
-        <p:spPr>
-          <a:xfrm>
-            <a:off x="8778240" y="7452360"/>
-            <a:ext cx="2468879" cy="640080"/>
-          </a:xfrm>
-          <a:prstGeom prst="roundRect">
-            <a:avLst/>
-          </a:prstGeom>
-          <a:solidFill>
-            <a:srgbClr val="F4CCCC"/>
-          </a:solidFill>
-          <a:ln w="15875">
-            <a:solidFill>
-              <a:srgbClr val="1F4E78"/>
-            </a:solidFill>
-          </a:ln>
-          <a:effectLst/>
-        </p:spPr>
-        <p:style>
-          <a:lnRef idx="1">
-            <a:schemeClr val="accent1"/>
-          </a:lnRef>
-          <a:fillRef idx="3">
-            <a:schemeClr val="accent1"/>
-          </a:fillRef>
-          <a:effectRef idx="2">
-            <a:schemeClr val="accent1"/>
-          </a:effectRef>
-          <a:fontRef idx="minor">
-            <a:schemeClr val="lt1"/>
-          </a:fontRef>
-        </p:style>
-        <p:txBody>
-          <a:bodyPr rtlCol="0" anchor="ctr" wrap="square" lIns="73152" rIns="73152" tIns="36576" bIns="36576"/>
-          <a:lstStyle/>
-          <a:p>
-            <a:pPr algn="ctr"/>
-            <a:r>
-              <a:rPr sz="1100" b="1">
-                <a:solidFill>
-                  <a:srgbClr val="202020"/>
-                </a:solidFill>
-              </a:rPr>
-              <a:t>Scratch Org Deploy</a:t>
-            </a:r>
-          </a:p>
-          <a:p>
-            <a:pPr algn="ctr"/>
-            <a:r>
-              <a:rPr sz="1100" b="1">
-                <a:solidFill>
-                  <a:srgbClr val="202020"/>
-                </a:solidFill>
-              </a:rPr>
-              <a:t>+ Validate / Tests</a:t>
-            </a:r>
-          </a:p>
-        </p:txBody>
-      </p:sp>
-      <p:cxnSp>
-        <p:nvCxnSpPr>
-          <p:cNvPr id="31" name="Connector 30"/>
-          <p:cNvCxnSpPr/>
-          <p:nvPr/>
-        </p:nvCxnSpPr>
-        <p:spPr>
-          <a:xfrm>
-            <a:off x="8412480" y="7772400"/>
-            <a:ext cx="365760" cy="0"/>
-          </a:xfrm>
-          <a:prstGeom prst="line">
-            <a:avLst/>
-          </a:prstGeom>
-          <a:ln w="22225">
-            <a:solidFill>
-              <a:srgbClr val="1F4E78"/>
-            </a:solidFill>
-            <a:tailEnd type="triangle" w="med" h="med"/>
-          </a:ln>
-        </p:spPr>
-        <p:style>
-          <a:lnRef idx="2">
-            <a:schemeClr val="accent1"/>
-          </a:lnRef>
-          <a:fillRef idx="0">
-            <a:schemeClr val="accent1"/>
-          </a:fillRef>
-          <a:effectRef idx="1">
-            <a:schemeClr val="accent1"/>
-          </a:effectRef>
-          <a:fontRef idx="minor">
-            <a:schemeClr val="tx1"/>
-          </a:fontRef>
-        </p:style>
-      </p:cxnSp>
-      <p:sp>
-        <p:nvSpPr>
-          <p:cNvPr id="32" name="Rounded Rectangle 31"/>
-          <p:cNvSpPr/>
-          <p:nvPr/>
-        </p:nvSpPr>
-        <p:spPr>
-          <a:xfrm>
-            <a:off x="11887200" y="5486400"/>
-            <a:ext cx="2377440" cy="685800"/>
-          </a:xfrm>
-          <a:prstGeom prst="roundRect">
-            <a:avLst/>
-          </a:prstGeom>
-          <a:solidFill>
-            <a:srgbClr val="DEEBF7"/>
-          </a:solidFill>
-          <a:ln w="15875">
-            <a:solidFill>
-              <a:srgbClr val="1F4E78"/>
-            </a:solidFill>
-          </a:ln>
-          <a:effectLst/>
-        </p:spPr>
-        <p:style>
-          <a:lnRef idx="1">
-            <a:schemeClr val="accent1"/>
-          </a:lnRef>
-          <a:fillRef idx="3">
-            <a:schemeClr val="accent1"/>
-          </a:fillRef>
-          <a:effectRef idx="2">
-            <a:schemeClr val="accent1"/>
-          </a:effectRef>
-          <a:fontRef idx="minor">
-            <a:schemeClr val="lt1"/>
-          </a:fontRef>
-        </p:style>
-        <p:txBody>
-          <a:bodyPr rtlCol="0" anchor="ctr" wrap="square" lIns="73152" rIns="73152" tIns="36576" bIns="36576"/>
-          <a:lstStyle/>
-          <a:p>
-            <a:pPr algn="ctr"/>
-            <a:r>
-              <a:rPr sz="1100" b="1">
-                <a:solidFill>
-                  <a:srgbClr val="202020"/>
-                </a:solidFill>
-              </a:rPr>
-              <a:t>Commit · Push</a:t>
-            </a:r>
-          </a:p>
-          <a:p>
-            <a:pPr algn="ctr"/>
-            <a:r>
-              <a:rPr sz="1100" b="1">
-                <a:solidFill>
-                  <a:srgbClr val="202020"/>
-                </a:solidFill>
-              </a:rPr>
-              <a:t>Open PR (gh)</a:t>
-            </a:r>
-          </a:p>
-        </p:txBody>
-      </p:sp>
-      <p:sp>
-        <p:nvSpPr>
-          <p:cNvPr id="33" name="Rounded Rectangle 32"/>
-          <p:cNvSpPr/>
-          <p:nvPr/>
-        </p:nvSpPr>
-        <p:spPr>
-          <a:xfrm>
-            <a:off x="11887200" y="6400800"/>
-            <a:ext cx="2377440" cy="685800"/>
-          </a:xfrm>
-          <a:prstGeom prst="roundRect">
-            <a:avLst/>
-          </a:prstGeom>
-          <a:solidFill>
-            <a:srgbClr val="F4CCCC"/>
-          </a:solidFill>
-          <a:ln w="15875">
-            <a:solidFill>
-              <a:srgbClr val="1F4E78"/>
-            </a:solidFill>
-          </a:ln>
-          <a:effectLst/>
-        </p:spPr>
-        <p:style>
-          <a:lnRef idx="1">
-            <a:schemeClr val="accent1"/>
-          </a:lnRef>
-          <a:fillRef idx="3">
-            <a:schemeClr val="accent1"/>
-          </a:fillRef>
-          <a:effectRef idx="2">
-            <a:schemeClr val="accent1"/>
-          </a:effectRef>
-          <a:fontRef idx="minor">
-            <a:schemeClr val="lt1"/>
-          </a:fontRef>
-        </p:style>
-        <p:txBody>
-          <a:bodyPr rtlCol="0" anchor="ctr" wrap="square" lIns="73152" rIns="73152" tIns="36576" bIns="36576"/>
-          <a:lstStyle/>
-          <a:p>
-            <a:pPr algn="ctr"/>
-            <a:r>
-              <a:rPr sz="1100" b="1">
-                <a:solidFill>
-                  <a:srgbClr val="202020"/>
-                </a:solidFill>
-              </a:rPr>
-              <a:t>tester agent</a:t>
-            </a:r>
-          </a:p>
-          <a:p>
-            <a:pPr algn="ctr"/>
-            <a:r>
-              <a:rPr sz="1100" b="1">
-                <a:solidFill>
-                  <a:srgbClr val="202020"/>
-                </a:solidFill>
-              </a:rPr>
-              <a:t>SHA-pinned Report</a:t>
-            </a:r>
-          </a:p>
-        </p:txBody>
-      </p:sp>
-      <p:sp>
-        <p:nvSpPr>
-          <p:cNvPr id="34" name="Rounded Rectangle 33"/>
-          <p:cNvSpPr/>
-          <p:nvPr/>
-        </p:nvSpPr>
-        <p:spPr>
-          <a:xfrm>
-            <a:off x="11887200" y="7360920"/>
-            <a:ext cx="2377440" cy="685800"/>
-          </a:xfrm>
-          <a:prstGeom prst="roundRect">
-            <a:avLst/>
-          </a:prstGeom>
-          <a:solidFill>
-            <a:srgbClr val="F4CCCC"/>
-          </a:solidFill>
-          <a:ln w="15875">
-            <a:solidFill>
-              <a:srgbClr val="1F4E78"/>
-            </a:solidFill>
-          </a:ln>
-          <a:effectLst/>
-        </p:spPr>
-        <p:style>
-          <a:lnRef idx="1">
-            <a:schemeClr val="accent1"/>
-          </a:lnRef>
-          <a:fillRef idx="3">
-            <a:schemeClr val="accent1"/>
-          </a:fillRef>
-          <a:effectRef idx="2">
-            <a:schemeClr val="accent1"/>
-          </a:effectRef>
-          <a:fontRef idx="minor">
-            <a:schemeClr val="lt1"/>
-          </a:fontRef>
-        </p:style>
-        <p:txBody>
-          <a:bodyPr rtlCol="0" anchor="ctr" wrap="square" lIns="73152" rIns="73152" tIns="36576" bIns="36576"/>
-          <a:lstStyle/>
-          <a:p>
-            <a:pPr algn="ctr"/>
-            <a:r>
-              <a:rPr sz="1100" b="1">
-                <a:solidFill>
-                  <a:srgbClr val="202020"/>
-                </a:solidFill>
-              </a:rPr>
-              <a:t>dev-fixer (≤3×)</a:t>
-            </a:r>
-          </a:p>
-          <a:p>
-            <a:pPr algn="ctr"/>
-            <a:r>
-              <a:rPr sz="1100" b="1">
-                <a:solidFill>
-                  <a:srgbClr val="202020"/>
-                </a:solidFill>
-              </a:rPr>
-              <a:t>on failure</a:t>
-            </a:r>
-          </a:p>
-        </p:txBody>
-      </p:sp>
-      <p:cxnSp>
-        <p:nvCxnSpPr>
-          <p:cNvPr id="35" name="Connector 34"/>
-          <p:cNvCxnSpPr/>
-          <p:nvPr/>
-        </p:nvCxnSpPr>
-        <p:spPr>
-          <a:xfrm flipV="1">
-            <a:off x="11247119" y="5829300"/>
-            <a:ext cx="640081" cy="1943100"/>
-          </a:xfrm>
-          <a:prstGeom prst="bentConnector3">
-            <a:avLst/>
-          </a:prstGeom>
-          <a:ln w="22225">
-            <a:solidFill>
-              <a:srgbClr val="1F4E78"/>
-            </a:solidFill>
-            <a:tailEnd type="triangle" w="med" h="med"/>
-          </a:ln>
-        </p:spPr>
-        <p:style>
-          <a:lnRef idx="2">
-            <a:schemeClr val="accent1"/>
-          </a:lnRef>
-          <a:fillRef idx="0">
-            <a:schemeClr val="accent1"/>
-          </a:fillRef>
-          <a:effectRef idx="1">
-            <a:schemeClr val="accent1"/>
-          </a:effectRef>
-          <a:fontRef idx="minor">
-            <a:schemeClr val="tx1"/>
-          </a:fontRef>
-        </p:style>
-      </p:cxnSp>
-      <p:cxnSp>
-        <p:nvCxnSpPr>
-          <p:cNvPr id="36" name="Connector 35"/>
-          <p:cNvCxnSpPr/>
-          <p:nvPr/>
-        </p:nvCxnSpPr>
-        <p:spPr>
-          <a:xfrm>
-            <a:off x="13075920" y="6172200"/>
-            <a:ext cx="0" cy="228600"/>
-          </a:xfrm>
-          <a:prstGeom prst="line">
-            <a:avLst/>
-          </a:prstGeom>
-          <a:ln w="22225">
-            <a:solidFill>
-              <a:srgbClr val="1F4E78"/>
-            </a:solidFill>
-            <a:tailEnd type="triangle" w="med" h="med"/>
-          </a:ln>
-        </p:spPr>
-        <p:style>
-          <a:lnRef idx="2">
-            <a:schemeClr val="accent1"/>
-          </a:lnRef>
-          <a:fillRef idx="0">
-            <a:schemeClr val="accent1"/>
-          </a:fillRef>
-          <a:effectRef idx="1">
-            <a:schemeClr val="accent1"/>
-          </a:effectRef>
-          <a:fontRef idx="minor">
-            <a:schemeClr val="tx1"/>
-          </a:fontRef>
-        </p:style>
-      </p:cxnSp>
-      <p:cxnSp>
-        <p:nvCxnSpPr>
-          <p:cNvPr id="37" name="Connector 36"/>
-          <p:cNvCxnSpPr/>
-          <p:nvPr/>
-        </p:nvCxnSpPr>
-        <p:spPr>
-          <a:xfrm>
-            <a:off x="13075920" y="7086600"/>
-            <a:ext cx="0" cy="274320"/>
-          </a:xfrm>
-          <a:prstGeom prst="line">
-            <a:avLst/>
-          </a:prstGeom>
-          <a:ln w="22225">
-            <a:solidFill>
-              <a:srgbClr val="1F4E78"/>
-            </a:solidFill>
-            <a:tailEnd type="triangle" w="med" h="med"/>
-          </a:ln>
-        </p:spPr>
-        <p:style>
-          <a:lnRef idx="2">
-            <a:schemeClr val="accent1"/>
-          </a:lnRef>
-          <a:fillRef idx="0">
-            <a:schemeClr val="accent1"/>
-          </a:fillRef>
-          <a:effectRef idx="1">
-            <a:schemeClr val="accent1"/>
-          </a:effectRef>
-          <a:fontRef idx="minor">
-            <a:schemeClr val="tx1"/>
-          </a:fontRef>
-        </p:style>
-      </p:cxnSp>
-      <p:sp>
-        <p:nvSpPr>
-          <p:cNvPr id="38" name="TextBox 37"/>
-          <p:cNvSpPr txBox="1"/>
-          <p:nvPr/>
-        </p:nvSpPr>
-        <p:spPr>
-          <a:xfrm>
-            <a:off x="14264640" y="6995160"/>
-            <a:ext cx="914400" cy="274320"/>
-          </a:xfrm>
-          <a:prstGeom prst="rect">
-            <a:avLst/>
-          </a:prstGeom>
-          <a:noFill/>
-        </p:spPr>
-        <p:txBody>
-          <a:bodyPr wrap="none" lIns="18288" rIns="18288" tIns="0" bIns="0">
-            <a:spAutoFit/>
-          </a:bodyPr>
-          <a:lstStyle/>
-          <a:p>
-            <a:pPr algn="ctr"/>
-            <a:r>
-              <a:rPr sz="1000" b="1">
-                <a:solidFill>
-                  <a:srgbClr val="C00000"/>
-                </a:solidFill>
-              </a:rPr>
-              <a:t>fail</a:t>
-            </a:r>
-          </a:p>
-        </p:txBody>
-      </p:sp>
-      <p:cxnSp>
-        <p:nvCxnSpPr>
-          <p:cNvPr id="39" name="Connector 38"/>
-          <p:cNvCxnSpPr/>
-          <p:nvPr/>
-        </p:nvCxnSpPr>
-        <p:spPr>
-          <a:xfrm flipH="1" flipV="1">
-            <a:off x="11430000" y="6743700"/>
-            <a:ext cx="457200" cy="960120"/>
-          </a:xfrm>
-          <a:prstGeom prst="bentConnector3">
-            <a:avLst/>
-          </a:prstGeom>
-          <a:ln w="22225">
-            <a:solidFill>
-              <a:srgbClr val="1F4E78"/>
-            </a:solidFill>
-            <a:tailEnd type="triangle" w="med" h="med"/>
-          </a:ln>
-        </p:spPr>
-        <p:style>
-          <a:lnRef idx="2">
-            <a:schemeClr val="accent1"/>
-          </a:lnRef>
-          <a:fillRef idx="0">
-            <a:schemeClr val="accent1"/>
-          </a:fillRef>
-          <a:effectRef idx="1">
-            <a:schemeClr val="accent1"/>
-          </a:effectRef>
-          <a:fontRef idx="minor">
-            <a:schemeClr val="tx1"/>
-          </a:fontRef>
-        </p:style>
-      </p:cxnSp>
-      <p:sp>
-        <p:nvSpPr>
-          <p:cNvPr id="40" name="TextBox 39"/>
-          <p:cNvSpPr txBox="1"/>
-          <p:nvPr/>
-        </p:nvSpPr>
-        <p:spPr>
-          <a:xfrm>
-            <a:off x="10241280" y="7040880"/>
-            <a:ext cx="1463040" cy="274320"/>
-          </a:xfrm>
-          <a:prstGeom prst="rect">
-            <a:avLst/>
-          </a:prstGeom>
-          <a:noFill/>
-        </p:spPr>
-        <p:txBody>
-          <a:bodyPr wrap="none" lIns="18288" rIns="18288" tIns="0" bIns="0">
-            <a:spAutoFit/>
-          </a:bodyPr>
-          <a:lstStyle/>
-          <a:p>
-            <a:pPr algn="ctr"/>
-            <a:r>
-              <a:rPr sz="1000" b="1">
-                <a:solidFill>
-                  <a:srgbClr val="1F4E78"/>
-                </a:solidFill>
-              </a:rPr>
-              <a:t>retry</a:t>
-            </a:r>
-          </a:p>
-        </p:txBody>
-      </p:sp>
-      <p:sp>
-        <p:nvSpPr>
-          <p:cNvPr id="41" name="Rounded Rectangle 40"/>
-          <p:cNvSpPr/>
-          <p:nvPr/>
-        </p:nvSpPr>
-        <p:spPr>
-          <a:xfrm>
-            <a:off x="8778240" y="5486400"/>
-            <a:ext cx="2377440" cy="685800"/>
-          </a:xfrm>
-          <a:prstGeom prst="roundRect">
-            <a:avLst/>
-          </a:prstGeom>
-          <a:solidFill>
-            <a:srgbClr val="E2EFDA"/>
-          </a:solidFill>
-          <a:ln w="15875">
-            <a:solidFill>
-              <a:srgbClr val="1F4E78"/>
-            </a:solidFill>
-          </a:ln>
-          <a:effectLst/>
-        </p:spPr>
-        <p:style>
-          <a:lnRef idx="1">
-            <a:schemeClr val="accent1"/>
-          </a:lnRef>
-          <a:fillRef idx="3">
-            <a:schemeClr val="accent1"/>
-          </a:fillRef>
-          <a:effectRef idx="2">
-            <a:schemeClr val="accent1"/>
-          </a:effectRef>
-          <a:fontRef idx="minor">
-            <a:schemeClr val="lt1"/>
-          </a:fontRef>
-        </p:style>
-        <p:txBody>
-          <a:bodyPr rtlCol="0" anchor="ctr" wrap="square" lIns="73152" rIns="73152" tIns="36576" bIns="36576"/>
-          <a:lstStyle/>
-          <a:p>
-            <a:pPr algn="ctr"/>
-            <a:r>
-              <a:rPr sz="1100" b="1">
-                <a:solidFill>
-                  <a:srgbClr val="202020"/>
-                </a:solidFill>
-              </a:rPr>
-              <a:t>ai-implemented</a:t>
-            </a:r>
-          </a:p>
-          <a:p>
-            <a:pPr algn="ctr"/>
-            <a:r>
-              <a:rPr sz="1100" b="1">
-                <a:solidFill>
-                  <a:srgbClr val="202020"/>
-                </a:solidFill>
-              </a:rPr>
-              <a:t>Ready for human merge</a:t>
-            </a:r>
-          </a:p>
-        </p:txBody>
-      </p:sp>
-      <p:cxnSp>
-        <p:nvCxnSpPr>
-          <p:cNvPr id="42" name="Connector 41"/>
-          <p:cNvCxnSpPr/>
-          <p:nvPr/>
-        </p:nvCxnSpPr>
-        <p:spPr>
-          <a:xfrm flipH="1" flipV="1">
-            <a:off x="11155680" y="5829300"/>
-            <a:ext cx="731520" cy="914400"/>
-          </a:xfrm>
-          <a:prstGeom prst="bentConnector3">
-            <a:avLst/>
-          </a:prstGeom>
-          <a:ln w="22225">
-            <a:solidFill>
-              <a:srgbClr val="1F4E78"/>
-            </a:solidFill>
-            <a:tailEnd type="triangle" w="med" h="med"/>
-          </a:ln>
-        </p:spPr>
-        <p:style>
-          <a:lnRef idx="2">
-            <a:schemeClr val="accent1"/>
-          </a:lnRef>
-          <a:fillRef idx="0">
-            <a:schemeClr val="accent1"/>
-          </a:fillRef>
-          <a:effectRef idx="1">
-            <a:schemeClr val="accent1"/>
-          </a:effectRef>
-          <a:fontRef idx="minor">
-            <a:schemeClr val="tx1"/>
-          </a:fontRef>
-        </p:style>
-      </p:cxnSp>
-      <p:sp>
-        <p:nvSpPr>
-          <p:cNvPr id="43" name="TextBox 42"/>
-          <p:cNvSpPr txBox="1"/>
-          <p:nvPr/>
-        </p:nvSpPr>
-        <p:spPr>
-          <a:xfrm>
-            <a:off x="11155680" y="6035040"/>
-            <a:ext cx="914400" cy="274320"/>
-          </a:xfrm>
-          <a:prstGeom prst="rect">
-            <a:avLst/>
-          </a:prstGeom>
-          <a:noFill/>
-        </p:spPr>
-        <p:txBody>
-          <a:bodyPr wrap="none" lIns="18288" rIns="18288" tIns="0" bIns="0">
-            <a:spAutoFit/>
-          </a:bodyPr>
-          <a:lstStyle/>
-          <a:p>
-            <a:pPr algn="ctr"/>
-            <a:r>
-              <a:rPr sz="1000" b="1">
-                <a:solidFill>
-                  <a:srgbClr val="006E2E"/>
-                </a:solidFill>
-              </a:rPr>
-              <a:t>pass</a:t>
-            </a:r>
-          </a:p>
-        </p:txBody>
-      </p:sp>
-      <p:sp>
-        <p:nvSpPr>
-          <p:cNvPr id="44" name="Rectangle 43"/>
-          <p:cNvSpPr/>
-          <p:nvPr/>
-        </p:nvSpPr>
-        <p:spPr>
-          <a:xfrm>
-            <a:off x="365760" y="777240"/>
-            <a:ext cx="228600" cy="228600"/>
+            <a:off x="457200" y="7680960"/>
+            <a:ext cx="201168" cy="201168"/>
           </a:xfrm>
           <a:prstGeom prst="rect">
             <a:avLst/>
@@ -5178,6 +5525,7 @@
               <a:srgbClr val="1F4E78"/>
             </a:solidFill>
           </a:ln>
+          <a:effectLst/>
         </p:spPr>
         <p:style>
           <a:lnRef idx="1">
@@ -5203,13 +5551,13 @@
       </p:sp>
       <p:sp>
         <p:nvSpPr>
-          <p:cNvPr id="45" name="TextBox 44"/>
+          <p:cNvPr id="47" name="TextBox 46"/>
           <p:cNvSpPr txBox="1"/>
           <p:nvPr/>
         </p:nvSpPr>
         <p:spPr>
           <a:xfrm>
-            <a:off x="640080" y="758952"/>
+            <a:off x="704088" y="7662672"/>
             <a:ext cx="1463040" cy="274320"/>
           </a:xfrm>
           <a:prstGeom prst="rect">
@@ -5218,13 +5566,14 @@
           <a:noFill/>
         </p:spPr>
         <p:txBody>
-          <a:bodyPr wrap="none">
+          <a:bodyPr wrap="square" lIns="18288" rIns="18288" tIns="0" bIns="0">
             <a:spAutoFit/>
           </a:bodyPr>
           <a:lstStyle/>
           <a:p>
-            <a:r>
-              <a:rPr sz="1000">
+            <a:pPr algn="l"/>
+            <a:r>
+              <a:rPr sz="1000" b="0">
                 <a:solidFill>
                   <a:srgbClr val="202020"/>
                 </a:solidFill>
@@ -5236,14 +5585,14 @@
       </p:sp>
       <p:sp>
         <p:nvSpPr>
-          <p:cNvPr id="46" name="Rectangle 45"/>
+          <p:cNvPr id="48" name="Rectangle 47"/>
           <p:cNvSpPr/>
           <p:nvPr/>
         </p:nvSpPr>
         <p:spPr>
           <a:xfrm>
-            <a:off x="2148840" y="777240"/>
-            <a:ext cx="228600" cy="228600"/>
+            <a:off x="2651760" y="7680960"/>
+            <a:ext cx="201168" cy="201168"/>
           </a:xfrm>
           <a:prstGeom prst="rect">
             <a:avLst/>
@@ -5256,6 +5605,7 @@
               <a:srgbClr val="1F4E78"/>
             </a:solidFill>
           </a:ln>
+          <a:effectLst/>
         </p:spPr>
         <p:style>
           <a:lnRef idx="1">
@@ -5281,13 +5631,13 @@
       </p:sp>
       <p:sp>
         <p:nvSpPr>
-          <p:cNvPr id="47" name="TextBox 46"/>
+          <p:cNvPr id="49" name="TextBox 48"/>
           <p:cNvSpPr txBox="1"/>
           <p:nvPr/>
         </p:nvSpPr>
         <p:spPr>
           <a:xfrm>
-            <a:off x="2423160" y="758952"/>
+            <a:off x="2898648" y="7662672"/>
             <a:ext cx="1463040" cy="274320"/>
           </a:xfrm>
           <a:prstGeom prst="rect">
@@ -5296,13 +5646,14 @@
           <a:noFill/>
         </p:spPr>
         <p:txBody>
-          <a:bodyPr wrap="none">
+          <a:bodyPr wrap="square" lIns="18288" rIns="18288" tIns="0" bIns="0">
             <a:spAutoFit/>
           </a:bodyPr>
           <a:lstStyle/>
           <a:p>
-            <a:r>
-              <a:rPr sz="1000">
+            <a:pPr algn="l"/>
+            <a:r>
+              <a:rPr sz="1000" b="0">
                 <a:solidFill>
                   <a:srgbClr val="202020"/>
                 </a:solidFill>
@@ -5314,14 +5665,14 @@
       </p:sp>
       <p:sp>
         <p:nvSpPr>
-          <p:cNvPr id="48" name="Rectangle 47"/>
+          <p:cNvPr id="50" name="Rectangle 49"/>
           <p:cNvSpPr/>
           <p:nvPr/>
         </p:nvSpPr>
         <p:spPr>
           <a:xfrm>
-            <a:off x="3931920" y="777240"/>
-            <a:ext cx="228600" cy="228600"/>
+            <a:off x="4846320" y="7680960"/>
+            <a:ext cx="201168" cy="201168"/>
           </a:xfrm>
           <a:prstGeom prst="rect">
             <a:avLst/>
@@ -5334,6 +5685,7 @@
               <a:srgbClr val="1F4E78"/>
             </a:solidFill>
           </a:ln>
+          <a:effectLst/>
         </p:spPr>
         <p:style>
           <a:lnRef idx="1">
@@ -5359,13 +5711,13 @@
       </p:sp>
       <p:sp>
         <p:nvSpPr>
-          <p:cNvPr id="49" name="TextBox 48"/>
+          <p:cNvPr id="51" name="TextBox 50"/>
           <p:cNvSpPr txBox="1"/>
           <p:nvPr/>
         </p:nvSpPr>
         <p:spPr>
           <a:xfrm>
-            <a:off x="4206240" y="758952"/>
+            <a:off x="5093208" y="7662672"/>
             <a:ext cx="1463040" cy="274320"/>
           </a:xfrm>
           <a:prstGeom prst="rect">
@@ -5374,13 +5726,14 @@
           <a:noFill/>
         </p:spPr>
         <p:txBody>
-          <a:bodyPr wrap="none">
+          <a:bodyPr wrap="square" lIns="18288" rIns="18288" tIns="0" bIns="0">
             <a:spAutoFit/>
           </a:bodyPr>
           <a:lstStyle/>
           <a:p>
-            <a:r>
-              <a:rPr sz="1000">
+            <a:pPr algn="l"/>
+            <a:r>
+              <a:rPr sz="1000" b="0">
                 <a:solidFill>
                   <a:srgbClr val="202020"/>
                 </a:solidFill>
@@ -5392,14 +5745,14 @@
       </p:sp>
       <p:sp>
         <p:nvSpPr>
-          <p:cNvPr id="50" name="Rectangle 49"/>
+          <p:cNvPr id="52" name="Rectangle 51"/>
           <p:cNvSpPr/>
           <p:nvPr/>
         </p:nvSpPr>
         <p:spPr>
           <a:xfrm>
-            <a:off x="5715000" y="777240"/>
-            <a:ext cx="228600" cy="228600"/>
+            <a:off x="7040879" y="7680960"/>
+            <a:ext cx="201168" cy="201168"/>
           </a:xfrm>
           <a:prstGeom prst="rect">
             <a:avLst/>
@@ -5412,6 +5765,7 @@
               <a:srgbClr val="1F4E78"/>
             </a:solidFill>
           </a:ln>
+          <a:effectLst/>
         </p:spPr>
         <p:style>
           <a:lnRef idx="1">
@@ -5437,13 +5791,13 @@
       </p:sp>
       <p:sp>
         <p:nvSpPr>
-          <p:cNvPr id="51" name="TextBox 50"/>
+          <p:cNvPr id="53" name="TextBox 52"/>
           <p:cNvSpPr txBox="1"/>
           <p:nvPr/>
         </p:nvSpPr>
         <p:spPr>
           <a:xfrm>
-            <a:off x="5989320" y="758952"/>
+            <a:off x="7287767" y="7662672"/>
             <a:ext cx="1463040" cy="274320"/>
           </a:xfrm>
           <a:prstGeom prst="rect">
@@ -5452,32 +5806,33 @@
           <a:noFill/>
         </p:spPr>
         <p:txBody>
-          <a:bodyPr wrap="none">
+          <a:bodyPr wrap="square" lIns="18288" rIns="18288" tIns="0" bIns="0">
             <a:spAutoFit/>
           </a:bodyPr>
           <a:lstStyle/>
           <a:p>
-            <a:r>
-              <a:rPr sz="1000">
-                <a:solidFill>
-                  <a:srgbClr val="202020"/>
-                </a:solidFill>
-              </a:rPr>
-              <a:t>Build agents</a:t>
-            </a:r>
-          </a:p>
-        </p:txBody>
-      </p:sp>
-      <p:sp>
-        <p:nvSpPr>
-          <p:cNvPr id="52" name="Rectangle 51"/>
+            <a:pPr algn="l"/>
+            <a:r>
+              <a:rPr sz="1000" b="0">
+                <a:solidFill>
+                  <a:srgbClr val="202020"/>
+                </a:solidFill>
+              </a:rPr>
+              <a:t>Build agent</a:t>
+            </a:r>
+          </a:p>
+        </p:txBody>
+      </p:sp>
+      <p:sp>
+        <p:nvSpPr>
+          <p:cNvPr id="54" name="Rectangle 53"/>
           <p:cNvSpPr/>
           <p:nvPr/>
         </p:nvSpPr>
         <p:spPr>
           <a:xfrm>
-            <a:off x="7498079" y="777240"/>
-            <a:ext cx="228600" cy="228600"/>
+            <a:off x="9235440" y="7680960"/>
+            <a:ext cx="201168" cy="201168"/>
           </a:xfrm>
           <a:prstGeom prst="rect">
             <a:avLst/>
@@ -5490,6 +5845,7 @@
               <a:srgbClr val="1F4E78"/>
             </a:solidFill>
           </a:ln>
+          <a:effectLst/>
         </p:spPr>
         <p:style>
           <a:lnRef idx="1">
@@ -5515,13 +5871,13 @@
       </p:sp>
       <p:sp>
         <p:nvSpPr>
-          <p:cNvPr id="53" name="TextBox 52"/>
+          <p:cNvPr id="55" name="TextBox 54"/>
           <p:cNvSpPr txBox="1"/>
           <p:nvPr/>
         </p:nvSpPr>
         <p:spPr>
           <a:xfrm>
-            <a:off x="7772400" y="758952"/>
+            <a:off x="9482328" y="7662672"/>
             <a:ext cx="1463040" cy="274320"/>
           </a:xfrm>
           <a:prstGeom prst="rect">
@@ -5530,13 +5886,14 @@
           <a:noFill/>
         </p:spPr>
         <p:txBody>
-          <a:bodyPr wrap="none">
+          <a:bodyPr wrap="square" lIns="18288" rIns="18288" tIns="0" bIns="0">
             <a:spAutoFit/>
           </a:bodyPr>
           <a:lstStyle/>
           <a:p>
-            <a:r>
-              <a:rPr sz="1000">
+            <a:pPr algn="l"/>
+            <a:r>
+              <a:rPr sz="1000" b="0">
                 <a:solidFill>
                   <a:srgbClr val="202020"/>
                 </a:solidFill>
@@ -5548,14 +5905,14 @@
       </p:sp>
       <p:sp>
         <p:nvSpPr>
-          <p:cNvPr id="54" name="Rectangle 53"/>
+          <p:cNvPr id="56" name="Rectangle 55"/>
           <p:cNvSpPr/>
           <p:nvPr/>
         </p:nvSpPr>
         <p:spPr>
           <a:xfrm>
-            <a:off x="9281160" y="777240"/>
-            <a:ext cx="228600" cy="228600"/>
+            <a:off x="11430000" y="7680960"/>
+            <a:ext cx="201168" cy="201168"/>
           </a:xfrm>
           <a:prstGeom prst="rect">
             <a:avLst/>
@@ -5568,6 +5925,7 @@
               <a:srgbClr val="1F4E78"/>
             </a:solidFill>
           </a:ln>
+          <a:effectLst/>
         </p:spPr>
         <p:style>
           <a:lnRef idx="1">
@@ -5593,13 +5951,13 @@
       </p:sp>
       <p:sp>
         <p:nvSpPr>
-          <p:cNvPr id="55" name="TextBox 54"/>
+          <p:cNvPr id="57" name="TextBox 56"/>
           <p:cNvSpPr txBox="1"/>
           <p:nvPr/>
         </p:nvSpPr>
         <p:spPr>
           <a:xfrm>
-            <a:off x="9555480" y="758952"/>
+            <a:off x="11676888" y="7662672"/>
             <a:ext cx="1463040" cy="274320"/>
           </a:xfrm>
           <a:prstGeom prst="rect">
@@ -5608,96 +5966,19 @@
           <a:noFill/>
         </p:spPr>
         <p:txBody>
-          <a:bodyPr wrap="none">
+          <a:bodyPr wrap="square" lIns="18288" rIns="18288" tIns="0" bIns="0">
             <a:spAutoFit/>
           </a:bodyPr>
           <a:lstStyle/>
           <a:p>
-            <a:r>
-              <a:rPr sz="1000">
+            <a:pPr algn="l"/>
+            <a:r>
+              <a:rPr sz="1000" b="0">
                 <a:solidFill>
                   <a:srgbClr val="202020"/>
                 </a:solidFill>
               </a:rPr>
               <a:t>Human step</a:t>
-            </a:r>
-          </a:p>
-        </p:txBody>
-      </p:sp>
-      <p:sp>
-        <p:nvSpPr>
-          <p:cNvPr id="56" name="Rectangle 55"/>
-          <p:cNvSpPr/>
-          <p:nvPr/>
-        </p:nvSpPr>
-        <p:spPr>
-          <a:xfrm>
-            <a:off x="11064240" y="777240"/>
-            <a:ext cx="228600" cy="228600"/>
-          </a:xfrm>
-          <a:prstGeom prst="rect">
-            <a:avLst/>
-          </a:prstGeom>
-          <a:solidFill>
-            <a:srgbClr val="D9D2E9"/>
-          </a:solidFill>
-          <a:ln>
-            <a:solidFill>
-              <a:srgbClr val="1F4E78"/>
-            </a:solidFill>
-          </a:ln>
-        </p:spPr>
-        <p:style>
-          <a:lnRef idx="1">
-            <a:schemeClr val="accent1"/>
-          </a:lnRef>
-          <a:fillRef idx="3">
-            <a:schemeClr val="accent1"/>
-          </a:fillRef>
-          <a:effectRef idx="2">
-            <a:schemeClr val="accent1"/>
-          </a:effectRef>
-          <a:fontRef idx="minor">
-            <a:schemeClr val="lt1"/>
-          </a:fontRef>
-        </p:style>
-        <p:txBody>
-          <a:bodyPr rtlCol="0" anchor="ctr"/>
-          <a:lstStyle/>
-          <a:p>
-            <a:pPr algn="ctr"/>
-          </a:p>
-        </p:txBody>
-      </p:sp>
-      <p:sp>
-        <p:nvSpPr>
-          <p:cNvPr id="57" name="TextBox 56"/>
-          <p:cNvSpPr txBox="1"/>
-          <p:nvPr/>
-        </p:nvSpPr>
-        <p:spPr>
-          <a:xfrm>
-            <a:off x="11338560" y="758952"/>
-            <a:ext cx="1463040" cy="274320"/>
-          </a:xfrm>
-          <a:prstGeom prst="rect">
-            <a:avLst/>
-          </a:prstGeom>
-          <a:noFill/>
-        </p:spPr>
-        <p:txBody>
-          <a:bodyPr wrap="none">
-            <a:spAutoFit/>
-          </a:bodyPr>
-          <a:lstStyle/>
-          <a:p>
-            <a:r>
-              <a:rPr sz="1000">
-                <a:solidFill>
-                  <a:srgbClr val="202020"/>
-                </a:solidFill>
-              </a:rPr>
-              <a:t>Decision</a:t>
             </a:r>
           </a:p>
         </p:txBody>
@@ -5729,7 +6010,7 @@
         <p:spPr>
           <a:xfrm>
             <a:off x="457200" y="274320"/>
-            <a:ext cx="13716000" cy="457200"/>
+            <a:ext cx="13716000" cy="502920"/>
           </a:xfrm>
           <a:prstGeom prst="rect">
             <a:avLst/>
@@ -5737,41 +6018,75 @@
           <a:noFill/>
         </p:spPr>
         <p:txBody>
-          <a:bodyPr wrap="none" lIns="18288" rIns="18288" tIns="0" bIns="0">
+          <a:bodyPr wrap="square" lIns="18288" rIns="18288" tIns="0" bIns="0">
             <a:spAutoFit/>
           </a:bodyPr>
           <a:lstStyle/>
           <a:p>
-            <a:pPr algn="ctr"/>
-            <a:r>
-              <a:rPr sz="2400" b="1">
+            <a:pPr algn="l"/>
+            <a:r>
+              <a:rPr sz="2600" b="1">
                 <a:solidFill>
                   <a:srgbClr val="1F4E78"/>
                 </a:solidFill>
               </a:rPr>
-              <a:t>Sub-Agent Pipeline</a:t>
-            </a:r>
-          </a:p>
-        </p:txBody>
-      </p:sp>
-      <p:sp>
-        <p:nvSpPr>
-          <p:cNvPr id="3" name="Rounded Rectangle 2"/>
+              <a:t>Ticket State Machine</a:t>
+            </a:r>
+          </a:p>
+        </p:txBody>
+      </p:sp>
+      <p:sp>
+        <p:nvSpPr>
+          <p:cNvPr id="3" name="TextBox 2"/>
+          <p:cNvSpPr txBox="1"/>
+          <p:nvPr/>
+        </p:nvSpPr>
+        <p:spPr>
+          <a:xfrm>
+            <a:off x="457200" y="777240"/>
+            <a:ext cx="13716000" cy="320040"/>
+          </a:xfrm>
+          <a:prstGeom prst="rect">
+            <a:avLst/>
+          </a:prstGeom>
+          <a:noFill/>
+        </p:spPr>
+        <p:txBody>
+          <a:bodyPr wrap="square" lIns="18288" rIns="18288" tIns="0" bIns="0">
+            <a:spAutoFit/>
+          </a:bodyPr>
+          <a:lstStyle/>
+          <a:p>
+            <a:pPr algn="l"/>
+            <a:r>
+              <a:rPr sz="1200" b="0">
+                <a:solidFill>
+                  <a:srgbClr val="606060"/>
+                </a:solidFill>
+              </a:rPr>
+              <a:t>Driven by Jira labels. Exactly one ai-* label active at a time.</a:t>
+            </a:r>
+          </a:p>
+        </p:txBody>
+      </p:sp>
+      <p:sp>
+        <p:nvSpPr>
+          <p:cNvPr id="4" name="Rounded Rectangle 3"/>
           <p:cNvSpPr/>
           <p:nvPr/>
         </p:nvSpPr>
         <p:spPr>
           <a:xfrm>
-            <a:off x="708659" y="3291840"/>
-            <a:ext cx="2011680" cy="1463040"/>
+            <a:off x="640080" y="2377440"/>
+            <a:ext cx="2377440" cy="1280160"/>
           </a:xfrm>
           <a:prstGeom prst="roundRect">
             <a:avLst/>
           </a:prstGeom>
           <a:solidFill>
-            <a:srgbClr val="E2EFDA"/>
+            <a:srgbClr val="FCE4D6"/>
           </a:solidFill>
-          <a:ln w="15875">
+          <a:ln w="12700">
             <a:solidFill>
               <a:srgbClr val="1F4E78"/>
             </a:solidFill>
@@ -5803,7 +6118,7 @@
                   <a:srgbClr val="202020"/>
                 </a:solidFill>
               </a:rPr>
-              <a:t>techlead</a:t>
+              <a:t>NEW</a:t>
             </a:r>
           </a:p>
           <a:p>
@@ -5817,40 +6132,29 @@
                   <a:srgbClr val="202020"/>
                 </a:solidFill>
               </a:rPr>
-              <a:t>Reads ticket + replies</a:t>
-            </a:r>
-          </a:p>
-          <a:p>
-            <a:pPr algn="ctr"/>
-            <a:r>
-              <a:rPr sz="1300" b="1">
-                <a:solidFill>
-                  <a:srgbClr val="202020"/>
-                </a:solidFill>
-              </a:rPr>
-              <a:t>Builds plan</a:t>
-            </a:r>
-          </a:p>
-        </p:txBody>
-      </p:sp>
-      <p:sp>
-        <p:nvSpPr>
-          <p:cNvPr id="4" name="Rounded Rectangle 3"/>
+              <a:t>(no label)</a:t>
+            </a:r>
+          </a:p>
+        </p:txBody>
+      </p:sp>
+      <p:sp>
+        <p:nvSpPr>
+          <p:cNvPr id="5" name="Rounded Rectangle 4"/>
           <p:cNvSpPr/>
           <p:nvPr/>
         </p:nvSpPr>
         <p:spPr>
           <a:xfrm>
-            <a:off x="2948939" y="3291840"/>
-            <a:ext cx="2011680" cy="1463040"/>
+            <a:off x="3383280" y="2377440"/>
+            <a:ext cx="2377440" cy="1280160"/>
           </a:xfrm>
           <a:prstGeom prst="roundRect">
             <a:avLst/>
           </a:prstGeom>
           <a:solidFill>
-            <a:srgbClr val="FFF2CC"/>
+            <a:srgbClr val="FFE699"/>
           </a:solidFill>
-          <a:ln w="15875">
+          <a:ln w="12700">
             <a:solidFill>
               <a:srgbClr val="1F4E78"/>
             </a:solidFill>
@@ -5882,7 +6186,7 @@
                   <a:srgbClr val="202020"/>
                 </a:solidFill>
               </a:rPr>
-              <a:t>contract</a:t>
+              <a:t>QUESTIONS_ASKED</a:t>
             </a:r>
           </a:p>
           <a:p>
@@ -5896,37 +6200,26 @@
                   <a:srgbClr val="202020"/>
                 </a:solidFill>
               </a:rPr>
-              <a:t>Metadata + APIs</a:t>
-            </a:r>
-          </a:p>
-          <a:p>
-            <a:pPr algn="ctr"/>
-            <a:r>
-              <a:rPr sz="1300" b="1">
-                <a:solidFill>
-                  <a:srgbClr val="202020"/>
-                </a:solidFill>
-              </a:rPr>
-              <a:t>Permission sets</a:t>
+              <a:t>ai-questions</a:t>
             </a:r>
           </a:p>
         </p:txBody>
       </p:sp>
       <p:cxnSp>
         <p:nvCxnSpPr>
-          <p:cNvPr id="5" name="Connector 4"/>
+          <p:cNvPr id="6" name="Connector 5"/>
           <p:cNvCxnSpPr/>
           <p:nvPr/>
         </p:nvCxnSpPr>
         <p:spPr>
           <a:xfrm>
-            <a:off x="2720339" y="4023360"/>
-            <a:ext cx="228600" cy="0"/>
+            <a:off x="3017520" y="3017520"/>
+            <a:ext cx="365760" cy="0"/>
           </a:xfrm>
           <a:prstGeom prst="line">
             <a:avLst/>
           </a:prstGeom>
-          <a:ln w="22225">
+          <a:ln w="19050">
             <a:solidFill>
               <a:srgbClr val="1F4E78"/>
             </a:solidFill>
@@ -5950,22 +6243,22 @@
       </p:cxnSp>
       <p:sp>
         <p:nvSpPr>
-          <p:cNvPr id="6" name="Rounded Rectangle 5"/>
+          <p:cNvPr id="7" name="Rounded Rectangle 6"/>
           <p:cNvSpPr/>
           <p:nvPr/>
         </p:nvSpPr>
         <p:spPr>
           <a:xfrm>
-            <a:off x="5189220" y="3291840"/>
-            <a:ext cx="2011680" cy="1463040"/>
+            <a:off x="6126480" y="2377440"/>
+            <a:ext cx="2377440" cy="1280160"/>
           </a:xfrm>
           <a:prstGeom prst="roundRect">
             <a:avLst/>
           </a:prstGeom>
           <a:solidFill>
-            <a:srgbClr val="FFF2CC"/>
+            <a:srgbClr val="E2EFDA"/>
           </a:solidFill>
-          <a:ln w="15875">
+          <a:ln w="12700">
             <a:solidFill>
               <a:srgbClr val="1F4E78"/>
             </a:solidFill>
@@ -5997,7 +6290,7 @@
                   <a:srgbClr val="202020"/>
                 </a:solidFill>
               </a:rPr>
-              <a:t>backend</a:t>
+              <a:t>PLAN_POSTED</a:t>
             </a:r>
           </a:p>
           <a:p>
@@ -6011,37 +6304,26 @@
                   <a:srgbClr val="202020"/>
                 </a:solidFill>
               </a:rPr>
-              <a:t>Apex classes</a:t>
-            </a:r>
-          </a:p>
-          <a:p>
-            <a:pPr algn="ctr"/>
-            <a:r>
-              <a:rPr sz="1300" b="1">
-                <a:solidFill>
-                  <a:srgbClr val="202020"/>
-                </a:solidFill>
-              </a:rPr>
-              <a:t>Triggers · Flows</a:t>
+              <a:t>ai-plan-posted</a:t>
             </a:r>
           </a:p>
         </p:txBody>
       </p:sp>
       <p:cxnSp>
         <p:nvCxnSpPr>
-          <p:cNvPr id="7" name="Connector 6"/>
+          <p:cNvPr id="8" name="Connector 7"/>
           <p:cNvCxnSpPr/>
           <p:nvPr/>
         </p:nvCxnSpPr>
         <p:spPr>
           <a:xfrm>
-            <a:off x="4960620" y="4023360"/>
-            <a:ext cx="228600" cy="0"/>
+            <a:off x="5760720" y="3017520"/>
+            <a:ext cx="365760" cy="0"/>
           </a:xfrm>
           <a:prstGeom prst="line">
             <a:avLst/>
           </a:prstGeom>
-          <a:ln w="22225">
+          <a:ln w="19050">
             <a:solidFill>
               <a:srgbClr val="1F4E78"/>
             </a:solidFill>
@@ -6065,22 +6347,22 @@
       </p:cxnSp>
       <p:sp>
         <p:nvSpPr>
-          <p:cNvPr id="8" name="Rounded Rectangle 7"/>
+          <p:cNvPr id="9" name="Rounded Rectangle 8"/>
           <p:cNvSpPr/>
           <p:nvPr/>
         </p:nvSpPr>
         <p:spPr>
           <a:xfrm>
-            <a:off x="7429500" y="3291840"/>
-            <a:ext cx="2011680" cy="1463040"/>
+            <a:off x="8869680" y="2377440"/>
+            <a:ext cx="2377440" cy="1280160"/>
           </a:xfrm>
           <a:prstGeom prst="roundRect">
             <a:avLst/>
           </a:prstGeom>
           <a:solidFill>
-            <a:srgbClr val="FFF2CC"/>
+            <a:srgbClr val="DEEBF7"/>
           </a:solidFill>
-          <a:ln w="15875">
+          <a:ln w="12700">
             <a:solidFill>
               <a:srgbClr val="1F4E78"/>
             </a:solidFill>
@@ -6112,7 +6394,7 @@
                   <a:srgbClr val="202020"/>
                 </a:solidFill>
               </a:rPr>
-              <a:t>frontend</a:t>
+              <a:t>IN_PROGRESS</a:t>
             </a:r>
           </a:p>
           <a:p>
@@ -6126,37 +6408,26 @@
                   <a:srgbClr val="202020"/>
                 </a:solidFill>
               </a:rPr>
-              <a:t>LWC / Aura</a:t>
-            </a:r>
-          </a:p>
-          <a:p>
-            <a:pPr algn="ctr"/>
-            <a:r>
-              <a:rPr sz="1300" b="1">
-                <a:solidFill>
-                  <a:srgbClr val="202020"/>
-                </a:solidFill>
-              </a:rPr>
-              <a:t>components</a:t>
+              <a:t>ai-in-progress</a:t>
             </a:r>
           </a:p>
         </p:txBody>
       </p:sp>
       <p:cxnSp>
         <p:nvCxnSpPr>
-          <p:cNvPr id="9" name="Connector 8"/>
+          <p:cNvPr id="10" name="Connector 9"/>
           <p:cNvCxnSpPr/>
           <p:nvPr/>
         </p:nvCxnSpPr>
         <p:spPr>
           <a:xfrm>
-            <a:off x="7200900" y="4023360"/>
-            <a:ext cx="228600" cy="0"/>
+            <a:off x="8503920" y="3017520"/>
+            <a:ext cx="365760" cy="0"/>
           </a:xfrm>
           <a:prstGeom prst="line">
             <a:avLst/>
           </a:prstGeom>
-          <a:ln w="22225">
+          <a:ln w="19050">
             <a:solidFill>
               <a:srgbClr val="1F4E78"/>
             </a:solidFill>
@@ -6180,22 +6451,22 @@
       </p:cxnSp>
       <p:sp>
         <p:nvSpPr>
-          <p:cNvPr id="10" name="Rounded Rectangle 9"/>
+          <p:cNvPr id="11" name="Rounded Rectangle 10"/>
           <p:cNvSpPr/>
           <p:nvPr/>
         </p:nvSpPr>
         <p:spPr>
           <a:xfrm>
-            <a:off x="9669780" y="3291840"/>
-            <a:ext cx="2011680" cy="1463040"/>
+            <a:off x="11612880" y="2377440"/>
+            <a:ext cx="2377440" cy="1280160"/>
           </a:xfrm>
           <a:prstGeom prst="roundRect">
             <a:avLst/>
           </a:prstGeom>
           <a:solidFill>
-            <a:srgbClr val="F4CCCC"/>
+            <a:srgbClr val="FFF2CC"/>
           </a:solidFill>
-          <a:ln w="15875">
+          <a:ln w="12700">
             <a:solidFill>
               <a:srgbClr val="1F4E78"/>
             </a:solidFill>
@@ -6227,7 +6498,7 @@
                   <a:srgbClr val="202020"/>
                 </a:solidFill>
               </a:rPr>
-              <a:t>tester</a:t>
+              <a:t>COMPLETED</a:t>
             </a:r>
           </a:p>
           <a:p>
@@ -6241,37 +6512,26 @@
                   <a:srgbClr val="202020"/>
                 </a:solidFill>
               </a:rPr>
-              <a:t>Validate · Tests</a:t>
-            </a:r>
-          </a:p>
-          <a:p>
-            <a:pPr algn="ctr"/>
-            <a:r>
-              <a:rPr sz="1300" b="1">
-                <a:solidFill>
-                  <a:srgbClr val="202020"/>
-                </a:solidFill>
-              </a:rPr>
-              <a:t>SHA-pinned report</a:t>
+              <a:t>ai-implemented</a:t>
             </a:r>
           </a:p>
         </p:txBody>
       </p:sp>
       <p:cxnSp>
         <p:nvCxnSpPr>
-          <p:cNvPr id="11" name="Connector 10"/>
+          <p:cNvPr id="12" name="Connector 11"/>
           <p:cNvCxnSpPr/>
           <p:nvPr/>
         </p:nvCxnSpPr>
         <p:spPr>
           <a:xfrm>
-            <a:off x="9441180" y="4023360"/>
-            <a:ext cx="228600" cy="0"/>
+            <a:off x="11247119" y="3017520"/>
+            <a:ext cx="365761" cy="0"/>
           </a:xfrm>
           <a:prstGeom prst="line">
             <a:avLst/>
           </a:prstGeom>
-          <a:ln w="22225">
+          <a:ln w="19050">
             <a:solidFill>
               <a:srgbClr val="1F4E78"/>
             </a:solidFill>
@@ -6295,14 +6555,14 @@
       </p:cxnSp>
       <p:sp>
         <p:nvSpPr>
-          <p:cNvPr id="12" name="Rounded Rectangle 11"/>
+          <p:cNvPr id="13" name="Rounded Rectangle 12"/>
           <p:cNvSpPr/>
           <p:nvPr/>
         </p:nvSpPr>
         <p:spPr>
           <a:xfrm>
-            <a:off x="11910059" y="3291840"/>
-            <a:ext cx="2011680" cy="1463040"/>
+            <a:off x="4754879" y="4572000"/>
+            <a:ext cx="2377440" cy="1280160"/>
           </a:xfrm>
           <a:prstGeom prst="roundRect">
             <a:avLst/>
@@ -6310,7 +6570,7 @@
           <a:solidFill>
             <a:srgbClr val="F4CCCC"/>
           </a:solidFill>
-          <a:ln w="15875">
+          <a:ln w="12700">
             <a:solidFill>
               <a:srgbClr val="1F4E78"/>
             </a:solidFill>
@@ -6342,7 +6602,7 @@
                   <a:srgbClr val="202020"/>
                 </a:solidFill>
               </a:rPr>
-              <a:t>dev-fixer</a:t>
+              <a:t>ERROR</a:t>
             </a:r>
           </a:p>
           <a:p>
@@ -6356,67 +6616,88 @@
                   <a:srgbClr val="202020"/>
                 </a:solidFill>
               </a:rPr>
-              <a:t>Minimal fix</a:t>
-            </a:r>
-          </a:p>
-          <a:p>
-            <a:pPr algn="ctr"/>
-            <a:r>
-              <a:rPr sz="1300" b="1">
-                <a:solidFill>
-                  <a:srgbClr val="202020"/>
-                </a:solidFill>
-              </a:rPr>
-              <a:t>≤3 attempts</a:t>
-            </a:r>
-          </a:p>
-        </p:txBody>
-      </p:sp>
-      <p:cxnSp>
-        <p:nvCxnSpPr>
-          <p:cNvPr id="13" name="Connector 12"/>
-          <p:cNvCxnSpPr/>
-          <p:nvPr/>
-        </p:nvCxnSpPr>
-        <p:spPr>
-          <a:xfrm>
-            <a:off x="11681459" y="4023360"/>
-            <a:ext cx="228600" cy="0"/>
-          </a:xfrm>
-          <a:prstGeom prst="line">
-            <a:avLst/>
-          </a:prstGeom>
-          <a:ln w="22225">
+              <a:t>ai-error</a:t>
+            </a:r>
+          </a:p>
+        </p:txBody>
+      </p:sp>
+      <p:sp>
+        <p:nvSpPr>
+          <p:cNvPr id="14" name="Rounded Rectangle 13"/>
+          <p:cNvSpPr/>
+          <p:nvPr/>
+        </p:nvSpPr>
+        <p:spPr>
+          <a:xfrm>
+            <a:off x="7498079" y="4572000"/>
+            <a:ext cx="2377440" cy="1280160"/>
+          </a:xfrm>
+          <a:prstGeom prst="roundRect">
+            <a:avLst/>
+          </a:prstGeom>
+          <a:solidFill>
+            <a:srgbClr val="F4CCCC"/>
+          </a:solidFill>
+          <a:ln w="12700">
             <a:solidFill>
               <a:srgbClr val="1F4E78"/>
             </a:solidFill>
-            <a:tailEnd type="triangle" w="med" h="med"/>
           </a:ln>
+          <a:effectLst/>
         </p:spPr>
         <p:style>
-          <a:lnRef idx="2">
+          <a:lnRef idx="1">
             <a:schemeClr val="accent1"/>
           </a:lnRef>
-          <a:fillRef idx="0">
+          <a:fillRef idx="3">
             <a:schemeClr val="accent1"/>
           </a:fillRef>
-          <a:effectRef idx="1">
+          <a:effectRef idx="2">
             <a:schemeClr val="accent1"/>
           </a:effectRef>
           <a:fontRef idx="minor">
-            <a:schemeClr val="tx1"/>
+            <a:schemeClr val="lt1"/>
           </a:fontRef>
         </p:style>
-      </p:cxnSp>
-      <p:sp>
-        <p:nvSpPr>
-          <p:cNvPr id="14" name="TextBox 13"/>
+        <p:txBody>
+          <a:bodyPr rtlCol="0" anchor="ctr" wrap="square" lIns="73152" rIns="73152" tIns="36576" bIns="36576"/>
+          <a:lstStyle/>
+          <a:p>
+            <a:pPr algn="ctr"/>
+            <a:r>
+              <a:rPr sz="1300" b="1">
+                <a:solidFill>
+                  <a:srgbClr val="202020"/>
+                </a:solidFill>
+              </a:rPr>
+              <a:t>BLOCKED</a:t>
+            </a:r>
+          </a:p>
+          <a:p>
+            <a:pPr algn="ctr"/>
+          </a:p>
+          <a:p>
+            <a:pPr algn="ctr"/>
+            <a:r>
+              <a:rPr sz="1300" b="1">
+                <a:solidFill>
+                  <a:srgbClr val="202020"/>
+                </a:solidFill>
+              </a:rPr>
+              <a:t>ai-needs-human</a:t>
+            </a:r>
+          </a:p>
+        </p:txBody>
+      </p:sp>
+      <p:sp>
+        <p:nvSpPr>
+          <p:cNvPr id="15" name="TextBox 14"/>
           <p:cNvSpPr txBox="1"/>
           <p:nvPr/>
         </p:nvSpPr>
         <p:spPr>
           <a:xfrm>
-            <a:off x="457200" y="2286000"/>
+            <a:off x="457200" y="6080760"/>
             <a:ext cx="13716000" cy="365760"/>
           </a:xfrm>
           <a:prstGeom prst="rect">
@@ -6425,53 +6706,19 @@
           <a:noFill/>
         </p:spPr>
         <p:txBody>
-          <a:bodyPr wrap="none" lIns="18288" rIns="18288" tIns="0" bIns="0">
+          <a:bodyPr wrap="square" lIns="18288" rIns="18288" tIns="0" bIns="0">
             <a:spAutoFit/>
           </a:bodyPr>
           <a:lstStyle/>
           <a:p>
             <a:pPr algn="ctr"/>
             <a:r>
-              <a:rPr sz="1400" b="0">
-                <a:solidFill>
-                  <a:srgbClr val="202020"/>
-                </a:solidFill>
-              </a:rPr>
-              <a:t>Each agent is spawned by the orchestrator and writes its own commits.</a:t>
-            </a:r>
-          </a:p>
-        </p:txBody>
-      </p:sp>
-      <p:sp>
-        <p:nvSpPr>
-          <p:cNvPr id="15" name="TextBox 14"/>
-          <p:cNvSpPr txBox="1"/>
-          <p:nvPr/>
-        </p:nvSpPr>
-        <p:spPr>
-          <a:xfrm>
-            <a:off x="457200" y="5120640"/>
-            <a:ext cx="13716000" cy="365760"/>
-          </a:xfrm>
-          <a:prstGeom prst="rect">
-            <a:avLst/>
-          </a:prstGeom>
-          <a:noFill/>
-        </p:spPr>
-        <p:txBody>
-          <a:bodyPr wrap="none" lIns="18288" rIns="18288" tIns="0" bIns="0">
-            <a:spAutoFit/>
-          </a:bodyPr>
-          <a:lstStyle/>
-          <a:p>
-            <a:pPr algn="ctr"/>
-            <a:r>
-              <a:rPr sz="1400" b="1">
-                <a:solidFill>
-                  <a:srgbClr val="C00000"/>
-                </a:solidFill>
-              </a:rPr>
-              <a:t>Hard gates: human approval before build · human merge after PR</a:t>
+              <a:rPr sz="1300" b="0">
+                <a:solidFill>
+                  <a:srgbClr val="202020"/>
+                </a:solidFill>
+              </a:rPr>
+              <a:t>ERROR = implementation halted (human diagnostic).   BLOCKED = fix cap (3×) reached (human takeover).</a:t>
             </a:r>
           </a:p>
         </p:txBody>
@@ -6503,7 +6750,7 @@
         <p:spPr>
           <a:xfrm>
             <a:off x="457200" y="274320"/>
-            <a:ext cx="13716000" cy="457200"/>
+            <a:ext cx="13716000" cy="502920"/>
           </a:xfrm>
           <a:prstGeom prst="rect">
             <a:avLst/>
@@ -6511,41 +6758,75 @@
           <a:noFill/>
         </p:spPr>
         <p:txBody>
-          <a:bodyPr wrap="none" lIns="18288" rIns="18288" tIns="0" bIns="0">
+          <a:bodyPr wrap="square" lIns="18288" rIns="18288" tIns="0" bIns="0">
             <a:spAutoFit/>
           </a:bodyPr>
           <a:lstStyle/>
           <a:p>
-            <a:pPr algn="ctr"/>
-            <a:r>
-              <a:rPr sz="2400" b="1">
+            <a:pPr algn="l"/>
+            <a:r>
+              <a:rPr sz="2600" b="1">
                 <a:solidFill>
                   <a:srgbClr val="1F4E78"/>
                 </a:solidFill>
               </a:rPr>
-              <a:t>Ticket State Machine</a:t>
-            </a:r>
-          </a:p>
-        </p:txBody>
-      </p:sp>
-      <p:sp>
-        <p:nvSpPr>
-          <p:cNvPr id="3" name="Rounded Rectangle 2"/>
+              <a:t>Sub-Agent Pipeline</a:t>
+            </a:r>
+          </a:p>
+        </p:txBody>
+      </p:sp>
+      <p:sp>
+        <p:nvSpPr>
+          <p:cNvPr id="3" name="TextBox 2"/>
+          <p:cNvSpPr txBox="1"/>
+          <p:nvPr/>
+        </p:nvSpPr>
+        <p:spPr>
+          <a:xfrm>
+            <a:off x="457200" y="777240"/>
+            <a:ext cx="13716000" cy="320040"/>
+          </a:xfrm>
+          <a:prstGeom prst="rect">
+            <a:avLst/>
+          </a:prstGeom>
+          <a:noFill/>
+        </p:spPr>
+        <p:txBody>
+          <a:bodyPr wrap="square" lIns="18288" rIns="18288" tIns="0" bIns="0">
+            <a:spAutoFit/>
+          </a:bodyPr>
+          <a:lstStyle/>
+          <a:p>
+            <a:pPr algn="l"/>
+            <a:r>
+              <a:rPr sz="1200" b="0">
+                <a:solidFill>
+                  <a:srgbClr val="606060"/>
+                </a:solidFill>
+              </a:rPr>
+              <a:t>Each sub-agent is spawned by the orchestrator and writes its own commits.</a:t>
+            </a:r>
+          </a:p>
+        </p:txBody>
+      </p:sp>
+      <p:sp>
+        <p:nvSpPr>
+          <p:cNvPr id="4" name="Rounded Rectangle 3"/>
           <p:cNvSpPr/>
           <p:nvPr/>
         </p:nvSpPr>
         <p:spPr>
           <a:xfrm>
-            <a:off x="1097280" y="2743200"/>
-            <a:ext cx="2194560" cy="1097280"/>
+            <a:off x="548640" y="2926080"/>
+            <a:ext cx="2103120" cy="1828800"/>
           </a:xfrm>
           <a:prstGeom prst="roundRect">
             <a:avLst/>
           </a:prstGeom>
           <a:solidFill>
-            <a:srgbClr val="FCE4D6"/>
+            <a:srgbClr val="E2EFDA"/>
           </a:solidFill>
-          <a:ln w="15875">
+          <a:ln w="12700">
             <a:solidFill>
               <a:srgbClr val="1F4E78"/>
             </a:solidFill>
@@ -6577,7 +6858,7 @@
                   <a:srgbClr val="202020"/>
                 </a:solidFill>
               </a:rPr>
-              <a:t>NEW</a:t>
+              <a:t>techlead</a:t>
             </a:r>
           </a:p>
           <a:p>
@@ -6591,29 +6872,51 @@
                   <a:srgbClr val="202020"/>
                 </a:solidFill>
               </a:rPr>
-              <a:t>(no label)</a:t>
-            </a:r>
-          </a:p>
-        </p:txBody>
-      </p:sp>
-      <p:sp>
-        <p:nvSpPr>
-          <p:cNvPr id="4" name="Rounded Rectangle 3"/>
+              <a:t>Reads ticket</a:t>
+            </a:r>
+          </a:p>
+          <a:p>
+            <a:pPr algn="ctr"/>
+            <a:r>
+              <a:rPr sz="1300" b="1">
+                <a:solidFill>
+                  <a:srgbClr val="202020"/>
+                </a:solidFill>
+              </a:rPr>
+              <a:t>+ replies</a:t>
+            </a:r>
+          </a:p>
+          <a:p>
+            <a:pPr algn="ctr"/>
+            <a:r>
+              <a:rPr sz="1300" b="1">
+                <a:solidFill>
+                  <a:srgbClr val="202020"/>
+                </a:solidFill>
+              </a:rPr>
+              <a:t>Builds plan</a:t>
+            </a:r>
+          </a:p>
+        </p:txBody>
+      </p:sp>
+      <p:sp>
+        <p:nvSpPr>
+          <p:cNvPr id="5" name="Rounded Rectangle 4"/>
           <p:cNvSpPr/>
           <p:nvPr/>
         </p:nvSpPr>
         <p:spPr>
           <a:xfrm>
-            <a:off x="3657600" y="2743200"/>
-            <a:ext cx="2194560" cy="1097280"/>
+            <a:off x="2834640" y="2926080"/>
+            <a:ext cx="2103120" cy="1828800"/>
           </a:xfrm>
           <a:prstGeom prst="roundRect">
             <a:avLst/>
           </a:prstGeom>
           <a:solidFill>
-            <a:srgbClr val="FFE699"/>
+            <a:srgbClr val="FFF2CC"/>
           </a:solidFill>
-          <a:ln w="15875">
+          <a:ln w="12700">
             <a:solidFill>
               <a:srgbClr val="1F4E78"/>
             </a:solidFill>
@@ -6645,7 +6948,7 @@
                   <a:srgbClr val="202020"/>
                 </a:solidFill>
               </a:rPr>
-              <a:t>QUESTIONS_ASKED</a:t>
+              <a:t>contract</a:t>
             </a:r>
           </a:p>
           <a:p>
@@ -6659,26 +6962,48 @@
                   <a:srgbClr val="202020"/>
                 </a:solidFill>
               </a:rPr>
-              <a:t>ai-questions</a:t>
+              <a:t>Metadata</a:t>
+            </a:r>
+          </a:p>
+          <a:p>
+            <a:pPr algn="ctr"/>
+            <a:r>
+              <a:rPr sz="1300" b="1">
+                <a:solidFill>
+                  <a:srgbClr val="202020"/>
+                </a:solidFill>
+              </a:rPr>
+              <a:t>+ Apex APIs</a:t>
+            </a:r>
+          </a:p>
+          <a:p>
+            <a:pPr algn="ctr"/>
+            <a:r>
+              <a:rPr sz="1300" b="1">
+                <a:solidFill>
+                  <a:srgbClr val="202020"/>
+                </a:solidFill>
+              </a:rPr>
+              <a:t>+ Permission sets</a:t>
             </a:r>
           </a:p>
         </p:txBody>
       </p:sp>
       <p:cxnSp>
         <p:nvCxnSpPr>
-          <p:cNvPr id="5" name="Connector 4"/>
+          <p:cNvPr id="6" name="Connector 5"/>
           <p:cNvCxnSpPr/>
           <p:nvPr/>
         </p:nvCxnSpPr>
         <p:spPr>
           <a:xfrm>
-            <a:off x="3291840" y="3291840"/>
-            <a:ext cx="365760" cy="0"/>
+            <a:off x="2670048" y="3840480"/>
+            <a:ext cx="146304" cy="0"/>
           </a:xfrm>
           <a:prstGeom prst="line">
             <a:avLst/>
           </a:prstGeom>
-          <a:ln w="22225">
+          <a:ln w="19050">
             <a:solidFill>
               <a:srgbClr val="1F4E78"/>
             </a:solidFill>
@@ -6702,22 +7027,22 @@
       </p:cxnSp>
       <p:sp>
         <p:nvSpPr>
-          <p:cNvPr id="6" name="Rounded Rectangle 5"/>
+          <p:cNvPr id="7" name="Rounded Rectangle 6"/>
           <p:cNvSpPr/>
           <p:nvPr/>
         </p:nvSpPr>
         <p:spPr>
           <a:xfrm>
-            <a:off x="6217920" y="2743200"/>
-            <a:ext cx="2194560" cy="1097280"/>
+            <a:off x="5120640" y="2926080"/>
+            <a:ext cx="2103120" cy="1828800"/>
           </a:xfrm>
           <a:prstGeom prst="roundRect">
             <a:avLst/>
           </a:prstGeom>
           <a:solidFill>
-            <a:srgbClr val="E2EFDA"/>
+            <a:srgbClr val="FFF2CC"/>
           </a:solidFill>
-          <a:ln w="15875">
+          <a:ln w="12700">
             <a:solidFill>
               <a:srgbClr val="1F4E78"/>
             </a:solidFill>
@@ -6749,7 +7074,7 @@
                   <a:srgbClr val="202020"/>
                 </a:solidFill>
               </a:rPr>
-              <a:t>PLAN_POSTED</a:t>
+              <a:t>backend</a:t>
             </a:r>
           </a:p>
           <a:p>
@@ -6763,26 +7088,48 @@
                   <a:srgbClr val="202020"/>
                 </a:solidFill>
               </a:rPr>
-              <a:t>ai-plan-posted</a:t>
+              <a:t>Apex classes</a:t>
+            </a:r>
+          </a:p>
+          <a:p>
+            <a:pPr algn="ctr"/>
+            <a:r>
+              <a:rPr sz="1300" b="1">
+                <a:solidFill>
+                  <a:srgbClr val="202020"/>
+                </a:solidFill>
+              </a:rPr>
+              <a:t>Triggers</a:t>
+            </a:r>
+          </a:p>
+          <a:p>
+            <a:pPr algn="ctr"/>
+            <a:r>
+              <a:rPr sz="1300" b="1">
+                <a:solidFill>
+                  <a:srgbClr val="202020"/>
+                </a:solidFill>
+              </a:rPr>
+              <a:t>Flows</a:t>
             </a:r>
           </a:p>
         </p:txBody>
       </p:sp>
       <p:cxnSp>
         <p:nvCxnSpPr>
-          <p:cNvPr id="7" name="Connector 6"/>
+          <p:cNvPr id="8" name="Connector 7"/>
           <p:cNvCxnSpPr/>
           <p:nvPr/>
         </p:nvCxnSpPr>
         <p:spPr>
           <a:xfrm>
-            <a:off x="5852160" y="3291840"/>
-            <a:ext cx="365760" cy="0"/>
+            <a:off x="4956048" y="3840480"/>
+            <a:ext cx="146304" cy="0"/>
           </a:xfrm>
           <a:prstGeom prst="line">
             <a:avLst/>
           </a:prstGeom>
-          <a:ln w="22225">
+          <a:ln w="19050">
             <a:solidFill>
               <a:srgbClr val="1F4E78"/>
             </a:solidFill>
@@ -6806,22 +7153,22 @@
       </p:cxnSp>
       <p:sp>
         <p:nvSpPr>
-          <p:cNvPr id="8" name="Rounded Rectangle 7"/>
+          <p:cNvPr id="9" name="Rounded Rectangle 8"/>
           <p:cNvSpPr/>
           <p:nvPr/>
         </p:nvSpPr>
         <p:spPr>
           <a:xfrm>
-            <a:off x="8778239" y="2743200"/>
-            <a:ext cx="2194560" cy="1097280"/>
+            <a:off x="7406640" y="2926080"/>
+            <a:ext cx="2103120" cy="1828800"/>
           </a:xfrm>
           <a:prstGeom prst="roundRect">
             <a:avLst/>
           </a:prstGeom>
           <a:solidFill>
-            <a:srgbClr val="DEEBF7"/>
+            <a:srgbClr val="FFF2CC"/>
           </a:solidFill>
-          <a:ln w="15875">
+          <a:ln w="12700">
             <a:solidFill>
               <a:srgbClr val="1F4E78"/>
             </a:solidFill>
@@ -6853,7 +7200,7 @@
                   <a:srgbClr val="202020"/>
                 </a:solidFill>
               </a:rPr>
-              <a:t>IN_PROGRESS</a:t>
+              <a:t>frontend</a:t>
             </a:r>
           </a:p>
           <a:p>
@@ -6867,26 +7214,37 @@
                   <a:srgbClr val="202020"/>
                 </a:solidFill>
               </a:rPr>
-              <a:t>ai-in-progress</a:t>
+              <a:t>LWC / Aura</a:t>
+            </a:r>
+          </a:p>
+          <a:p>
+            <a:pPr algn="ctr"/>
+            <a:r>
+              <a:rPr sz="1300" b="1">
+                <a:solidFill>
+                  <a:srgbClr val="202020"/>
+                </a:solidFill>
+              </a:rPr>
+              <a:t>components</a:t>
             </a:r>
           </a:p>
         </p:txBody>
       </p:sp>
       <p:cxnSp>
         <p:nvCxnSpPr>
-          <p:cNvPr id="9" name="Connector 8"/>
+          <p:cNvPr id="10" name="Connector 9"/>
           <p:cNvCxnSpPr/>
           <p:nvPr/>
         </p:nvCxnSpPr>
         <p:spPr>
           <a:xfrm>
-            <a:off x="8412480" y="3291840"/>
-            <a:ext cx="365759" cy="0"/>
+            <a:off x="7242048" y="3840480"/>
+            <a:ext cx="146304" cy="0"/>
           </a:xfrm>
           <a:prstGeom prst="line">
             <a:avLst/>
           </a:prstGeom>
-          <a:ln w="22225">
+          <a:ln w="19050">
             <a:solidFill>
               <a:srgbClr val="1F4E78"/>
             </a:solidFill>
@@ -6910,22 +7268,22 @@
       </p:cxnSp>
       <p:sp>
         <p:nvSpPr>
-          <p:cNvPr id="10" name="Rounded Rectangle 9"/>
+          <p:cNvPr id="11" name="Rounded Rectangle 10"/>
           <p:cNvSpPr/>
           <p:nvPr/>
         </p:nvSpPr>
         <p:spPr>
           <a:xfrm>
-            <a:off x="11338559" y="2743200"/>
-            <a:ext cx="2194560" cy="1097280"/>
+            <a:off x="9692640" y="2926080"/>
+            <a:ext cx="2103120" cy="1828800"/>
           </a:xfrm>
           <a:prstGeom prst="roundRect">
             <a:avLst/>
           </a:prstGeom>
           <a:solidFill>
-            <a:srgbClr val="FFF2CC"/>
+            <a:srgbClr val="F4CCCC"/>
           </a:solidFill>
-          <a:ln w="15875">
+          <a:ln w="12700">
             <a:solidFill>
               <a:srgbClr val="1F4E78"/>
             </a:solidFill>
@@ -6957,7 +7315,7 @@
                   <a:srgbClr val="202020"/>
                 </a:solidFill>
               </a:rPr>
-              <a:t>COMPLETED</a:t>
+              <a:t>tester</a:t>
             </a:r>
           </a:p>
           <a:p>
@@ -6971,26 +7329,48 @@
                   <a:srgbClr val="202020"/>
                 </a:solidFill>
               </a:rPr>
-              <a:t>ai-implemented</a:t>
+              <a:t>Validate</a:t>
+            </a:r>
+          </a:p>
+          <a:p>
+            <a:pPr algn="ctr"/>
+            <a:r>
+              <a:rPr sz="1300" b="1">
+                <a:solidFill>
+                  <a:srgbClr val="202020"/>
+                </a:solidFill>
+              </a:rPr>
+              <a:t>Apex + Jest</a:t>
+            </a:r>
+          </a:p>
+          <a:p>
+            <a:pPr algn="ctr"/>
+            <a:r>
+              <a:rPr sz="1300" b="1">
+                <a:solidFill>
+                  <a:srgbClr val="202020"/>
+                </a:solidFill>
+              </a:rPr>
+              <a:t>SHA report</a:t>
             </a:r>
           </a:p>
         </p:txBody>
       </p:sp>
       <p:cxnSp>
         <p:nvCxnSpPr>
-          <p:cNvPr id="11" name="Connector 10"/>
+          <p:cNvPr id="12" name="Connector 11"/>
           <p:cNvCxnSpPr/>
           <p:nvPr/>
         </p:nvCxnSpPr>
         <p:spPr>
           <a:xfrm>
-            <a:off x="10972799" y="3291840"/>
-            <a:ext cx="365760" cy="0"/>
+            <a:off x="9528048" y="3840480"/>
+            <a:ext cx="146304" cy="0"/>
           </a:xfrm>
           <a:prstGeom prst="line">
             <a:avLst/>
           </a:prstGeom>
-          <a:ln w="22225">
+          <a:ln w="19050">
             <a:solidFill>
               <a:srgbClr val="1F4E78"/>
             </a:solidFill>
@@ -7014,14 +7394,14 @@
       </p:cxnSp>
       <p:sp>
         <p:nvSpPr>
-          <p:cNvPr id="12" name="Rounded Rectangle 11"/>
+          <p:cNvPr id="13" name="Rounded Rectangle 12"/>
           <p:cNvSpPr/>
           <p:nvPr/>
         </p:nvSpPr>
         <p:spPr>
           <a:xfrm>
-            <a:off x="4937760" y="4937760"/>
-            <a:ext cx="2194560" cy="1097280"/>
+            <a:off x="11978640" y="2926080"/>
+            <a:ext cx="2103120" cy="1828800"/>
           </a:xfrm>
           <a:prstGeom prst="roundRect">
             <a:avLst/>
@@ -7029,7 +7409,7 @@
           <a:solidFill>
             <a:srgbClr val="F4CCCC"/>
           </a:solidFill>
-          <a:ln w="15875">
+          <a:ln w="12700">
             <a:solidFill>
               <a:srgbClr val="1F4E78"/>
             </a:solidFill>
@@ -7061,7 +7441,7 @@
                   <a:srgbClr val="202020"/>
                 </a:solidFill>
               </a:rPr>
-              <a:t>ERROR</a:t>
+              <a:t>dev-fixer</a:t>
             </a:r>
           </a:p>
           <a:p>
@@ -7075,89 +7455,79 @@
                   <a:srgbClr val="202020"/>
                 </a:solidFill>
               </a:rPr>
-              <a:t>ai-error</a:t>
-            </a:r>
-          </a:p>
-        </p:txBody>
-      </p:sp>
-      <p:sp>
-        <p:nvSpPr>
-          <p:cNvPr id="13" name="Rounded Rectangle 12"/>
-          <p:cNvSpPr/>
-          <p:nvPr/>
-        </p:nvSpPr>
-        <p:spPr>
-          <a:xfrm>
-            <a:off x="7498079" y="4937760"/>
-            <a:ext cx="2194560" cy="1097280"/>
-          </a:xfrm>
-          <a:prstGeom prst="roundRect">
-            <a:avLst/>
-          </a:prstGeom>
-          <a:solidFill>
-            <a:srgbClr val="F4CCCC"/>
-          </a:solidFill>
-          <a:ln w="15875">
+              <a:t>Minimal fix</a:t>
+            </a:r>
+          </a:p>
+          <a:p>
+            <a:pPr algn="ctr"/>
+            <a:r>
+              <a:rPr sz="1300" b="1">
+                <a:solidFill>
+                  <a:srgbClr val="202020"/>
+                </a:solidFill>
+              </a:rPr>
+              <a:t>≤ 3 attempts</a:t>
+            </a:r>
+          </a:p>
+          <a:p>
+            <a:pPr algn="ctr"/>
+            <a:r>
+              <a:rPr sz="1300" b="1">
+                <a:solidFill>
+                  <a:srgbClr val="202020"/>
+                </a:solidFill>
+              </a:rPr>
+              <a:t>then ai-needs-human</a:t>
+            </a:r>
+          </a:p>
+        </p:txBody>
+      </p:sp>
+      <p:cxnSp>
+        <p:nvCxnSpPr>
+          <p:cNvPr id="14" name="Connector 13"/>
+          <p:cNvCxnSpPr/>
+          <p:nvPr/>
+        </p:nvCxnSpPr>
+        <p:spPr>
+          <a:xfrm>
+            <a:off x="11814048" y="3840480"/>
+            <a:ext cx="146304" cy="0"/>
+          </a:xfrm>
+          <a:prstGeom prst="line">
+            <a:avLst/>
+          </a:prstGeom>
+          <a:ln w="19050">
             <a:solidFill>
               <a:srgbClr val="1F4E78"/>
             </a:solidFill>
+            <a:tailEnd type="triangle" w="med" h="med"/>
           </a:ln>
-          <a:effectLst/>
         </p:spPr>
         <p:style>
-          <a:lnRef idx="1">
+          <a:lnRef idx="2">
             <a:schemeClr val="accent1"/>
           </a:lnRef>
-          <a:fillRef idx="3">
+          <a:fillRef idx="0">
             <a:schemeClr val="accent1"/>
           </a:fillRef>
-          <a:effectRef idx="2">
+          <a:effectRef idx="1">
             <a:schemeClr val="accent1"/>
           </a:effectRef>
           <a:fontRef idx="minor">
-            <a:schemeClr val="lt1"/>
+            <a:schemeClr val="tx1"/>
           </a:fontRef>
         </p:style>
-        <p:txBody>
-          <a:bodyPr rtlCol="0" anchor="ctr" wrap="square" lIns="73152" rIns="73152" tIns="36576" bIns="36576"/>
-          <a:lstStyle/>
-          <a:p>
-            <a:pPr algn="ctr"/>
-            <a:r>
-              <a:rPr sz="1300" b="1">
-                <a:solidFill>
-                  <a:srgbClr val="202020"/>
-                </a:solidFill>
-              </a:rPr>
-              <a:t>BLOCKED</a:t>
-            </a:r>
-          </a:p>
-          <a:p>
-            <a:pPr algn="ctr"/>
-          </a:p>
-          <a:p>
-            <a:pPr algn="ctr"/>
-            <a:r>
-              <a:rPr sz="1300" b="1">
-                <a:solidFill>
-                  <a:srgbClr val="202020"/>
-                </a:solidFill>
-              </a:rPr>
-              <a:t>ai-needs-human</a:t>
-            </a:r>
-          </a:p>
-        </p:txBody>
-      </p:sp>
-      <p:sp>
-        <p:nvSpPr>
-          <p:cNvPr id="14" name="TextBox 13"/>
+      </p:cxnSp>
+      <p:sp>
+        <p:nvSpPr>
+          <p:cNvPr id="15" name="TextBox 14"/>
           <p:cNvSpPr txBox="1"/>
           <p:nvPr/>
         </p:nvSpPr>
         <p:spPr>
           <a:xfrm>
-            <a:off x="457200" y="6309360"/>
-            <a:ext cx="13716000" cy="365760"/>
+            <a:off x="457200" y="5486400"/>
+            <a:ext cx="13716000" cy="457200"/>
           </a:xfrm>
           <a:prstGeom prst="rect">
             <a:avLst/>
@@ -7165,32 +7535,32 @@
           <a:noFill/>
         </p:spPr>
         <p:txBody>
-          <a:bodyPr wrap="none" lIns="18288" rIns="18288" tIns="0" bIns="0">
+          <a:bodyPr wrap="square" lIns="18288" rIns="18288" tIns="0" bIns="0">
             <a:spAutoFit/>
           </a:bodyPr>
           <a:lstStyle/>
           <a:p>
             <a:pPr algn="ctr"/>
             <a:r>
-              <a:rPr sz="1300" b="0">
-                <a:solidFill>
-                  <a:srgbClr val="202020"/>
-                </a:solidFill>
-              </a:rPr>
-              <a:t>ERROR = implementation halted · BLOCKED = fix cap (3×) reached</a:t>
-            </a:r>
-          </a:p>
-        </p:txBody>
-      </p:sp>
-      <p:sp>
-        <p:nvSpPr>
-          <p:cNvPr id="15" name="TextBox 14"/>
+              <a:rPr sz="1400" b="1">
+                <a:solidFill>
+                  <a:srgbClr val="C00000"/>
+                </a:solidFill>
+              </a:rPr>
+              <a:t>Hard gates: human reply · human approval · human merge.</a:t>
+            </a:r>
+          </a:p>
+        </p:txBody>
+      </p:sp>
+      <p:sp>
+        <p:nvSpPr>
+          <p:cNvPr id="16" name="TextBox 15"/>
           <p:cNvSpPr txBox="1"/>
           <p:nvPr/>
         </p:nvSpPr>
         <p:spPr>
           <a:xfrm>
-            <a:off x="457200" y="1828800"/>
+            <a:off x="457200" y="6035040"/>
             <a:ext cx="13716000" cy="457200"/>
           </a:xfrm>
           <a:prstGeom prst="rect">
@@ -7199,19 +7569,19 @@
           <a:noFill/>
         </p:spPr>
         <p:txBody>
-          <a:bodyPr wrap="none" lIns="18288" rIns="18288" tIns="0" bIns="0">
+          <a:bodyPr wrap="square" lIns="18288" rIns="18288" tIns="0" bIns="0">
             <a:spAutoFit/>
           </a:bodyPr>
           <a:lstStyle/>
           <a:p>
             <a:pPr algn="ctr"/>
             <a:r>
-              <a:rPr sz="1400" b="0">
-                <a:solidFill>
-                  <a:srgbClr val="202020"/>
-                </a:solidFill>
-              </a:rPr>
-              <a:t>Driven by Jira labels (single active ai-* label per ticket)</a:t>
+              <a:rPr sz="1200" b="0">
+                <a:solidFill>
+                  <a:srgbClr val="202020"/>
+                </a:solidFill>
+              </a:rPr>
+              <a:t>Per-ticket: isolated git worktree + per-branch scratch org · torn down on success, preserved on error.</a:t>
             </a:r>
           </a:p>
         </p:txBody>
